--- a/day2-deck/decks/Day 2 Opening - Day 1 Style.pptx
+++ b/day2-deck/decks/Day 2 Opening - Day 1 Style.pptx
@@ -688,7 +688,7 @@
           <a:p>
             <a:r>
               <a:rPr lang="en-US" dirty="0"/>
-              <a:t>Appendix for review with Tommy. Alternate designs still to choose between: Door Rate / ELR % of Door Rate options, and Your Best Techs Prove It options A-C. Delete whichever we don't pick.</a:t>
+              <a:t>For review with Tommy, not for the room. Alternate versions of slides already in the deck, and slides not yet decided on. Door Rate / CP ELR % of Door Rate options A-E, and Your Best Techs Prove It options A-C. Pick one of each (or none), then delete this section before the meeting.</a:t>
             </a:r>
             <a:endParaRPr lang="en-US" dirty="0"/>
           </a:p>
@@ -2660,7 +2660,7 @@
                 <a:ea typeface="Inter" pitchFamily="34" charset="-122"/>
                 <a:cs typeface="Inter" pitchFamily="34" charset="-120"/>
               </a:rPr>
-              <a:t>APPENDIX</a:t>
+              <a:t>NOT PRESENTED · FOR REVIEW</a:t>
             </a:r>
             <a:endParaRPr lang="en-US" sz="2000" dirty="0"/>
           </a:p>
@@ -2699,7 +2699,7 @@
                 <a:ea typeface="Inter" pitchFamily="34" charset="-122"/>
                 <a:cs typeface="Inter" pitchFamily="34" charset="-120"/>
               </a:rPr>
-              <a:t>Design Options</a:t>
+              <a:t>Open Decisions</a:t>
             </a:r>
             <a:endParaRPr lang="en-US" sz="7600" dirty="0"/>
           </a:p>
@@ -2738,7 +2738,7 @@
                 <a:ea typeface="Inter" pitchFamily="34" charset="-122"/>
                 <a:cs typeface="Inter" pitchFamily="34" charset="-120"/>
               </a:rPr>
-              <a:t>Door rate   ·   Your best techs prove it</a:t>
+              <a:t>Door rate: options A–E   ·   Your best techs prove it: options A–C</a:t>
             </a:r>
             <a:endParaRPr lang="en-US" sz="2200" dirty="0"/>
           </a:p>

--- a/day2-deck/decks/Day 2 Opening - Day 1 Style.pptx
+++ b/day2-deck/decks/Day 2 Opening - Day 1 Style.pptx
@@ -688,7 +688,7 @@
           <a:p>
             <a:r>
               <a:rPr lang="en-US" dirty="0"/>
-              <a:t>For review with Tommy, not for the room. Alternate versions of slides already in the deck, and slides not yet decided on. Door Rate / CP ELR % of Door Rate options A-E, and Your Best Techs Prove It options A-C. Pick one of each (or none), then delete this section before the meeting.</a:t>
+              <a:t>For review with Tommy, not for the room. Every slide built but not placed in the deck: alternate versions of slides already in it, and slides not yet decided on. In deck order: Gross Trend options A / B / B+Q4, Store Records (six designs), Door Rate options A-E, Internal GP %, CP vs Internal GP % options A-B, Headcount trend, Best Techs options A-C, Who's Moving Now alternate versions, Most Improved v1. Pick what moves into the deck, then delete this section before the meeting.</a:t>
             </a:r>
             <a:endParaRPr lang="en-US" dirty="0"/>
           </a:p>
@@ -2738,7 +2738,7 @@
                 <a:ea typeface="Inter" pitchFamily="34" charset="-122"/>
                 <a:cs typeface="Inter" pitchFamily="34" charset="-120"/>
               </a:rPr>
-              <a:t>Door rate: options A–E   ·   Your best techs prove it: options A–C</a:t>
+              <a:t>Gross &amp; records   ·   Door rate   ·   Internal GP %   ·   Best techs   ·   Most improved</a:t>
             </a:r>
             <a:endParaRPr lang="en-US" sz="2200" dirty="0"/>
           </a:p>

--- a/day2-deck/decks/Day 2 Opening - Day 1 Style.pptx
+++ b/day2-deck/decks/Day 2 Opening - Day 1 Style.pptx
@@ -688,7 +688,7 @@
           <a:p>
             <a:r>
               <a:rPr lang="en-US" dirty="0"/>
-              <a:t>For review with Tommy, not for the room. Every slide built but not placed in the deck: alternate versions of slides already in it, and slides not yet decided on. In deck order: Gross Trend options A / B / B+Q4, Store Records (six designs), Door Rate options A-E, Internal GP %, CP vs Internal GP % options A-B, Headcount trend, Best Techs options A-C, Who's Moving Now alternate versions, Most Improved v1. Pick what moves into the deck, then delete this section before the meeting.</a:t>
+              <a:t>For review with Tommy, not for the room. Every slide built but not placed in the deck: alternate versions of slides already in it, and slides not yet decided on. In deck order: Gross Trend options A / B / B+Q4, Store Records (six designs), Door Rate options A-E, Internal GP %, CP vs Internal GP % options A-B, Headcount trend, Best Techs option C, Who's Moving Now alternate versions, Most Improved v1. Pick what moves into the deck, then delete this section before the meeting.</a:t>
             </a:r>
             <a:endParaRPr lang="en-US" dirty="0"/>
           </a:p>

--- a/day2-deck/decks/Day 2 Opening - Day 1 Style.pptx
+++ b/day2-deck/decks/Day 2 Opening - Day 1 Style.pptx
@@ -3810,7 +3810,7 @@
                 <a:ea typeface="Inter" pitchFamily="34" charset="-122"/>
                 <a:cs typeface="Inter" pitchFamily="34" charset="-120"/>
               </a:rPr>
-              <a:t>Warranty ROs and rate, internal rate and margin.</a:t>
+              <a:t>Warranty audits and compliance, warranty rate and ROs, internal rate.</a:t>
             </a:r>
             <a:endParaRPr lang="en-US" sz="1400" dirty="0"/>
           </a:p>
@@ -7522,7 +7522,7 @@
                 <a:ea typeface="Inter" pitchFamily="34" charset="-122"/>
                 <a:cs typeface="Inter" pitchFamily="34" charset="-120"/>
               </a:rPr>
-              <a:t>Warranty ROs   ·   Warranty ELR   ·   Internal ELR</a:t>
+              <a:t>Warranty audits   ·   Warranty ELR   ·   Warranty ROs   ·   Internal ELR</a:t>
             </a:r>
             <a:endParaRPr lang="en-US" sz="2200" dirty="0"/>
           </a:p>

--- a/day2-deck/decks/Day 2 Opening - Day 1 Style.pptx
+++ b/day2-deck/decks/Day 2 Opening - Day 1 Style.pptx
@@ -3810,7 +3810,7 @@
                 <a:ea typeface="Inter" pitchFamily="34" charset="-122"/>
                 <a:cs typeface="Inter" pitchFamily="34" charset="-120"/>
               </a:rPr>
-              <a:t>Warranty audits and compliance, warranty rate and ROs, internal rate.</a:t>
+              <a:t>Warranty rate increases, audits and compliance, internal rate.</a:t>
             </a:r>
             <a:endParaRPr lang="en-US" sz="1400" dirty="0"/>
           </a:p>
@@ -7522,7 +7522,7 @@
                 <a:ea typeface="Inter" pitchFamily="34" charset="-122"/>
                 <a:cs typeface="Inter" pitchFamily="34" charset="-120"/>
               </a:rPr>
-              <a:t>Warranty audits   ·   Warranty ELR   ·   Warranty ROs   ·   Internal ELR</a:t>
+              <a:t>Rate increases   ·   Warranty audits   ·   Warranty ELR   ·   Internal ELR</a:t>
             </a:r>
             <a:endParaRPr lang="en-US" sz="2200" dirty="0"/>
           </a:p>

--- a/day2-deck/decks/Day 2 Opening - Day 1 Style.pptx
+++ b/day2-deck/decks/Day 2 Opening - Day 1 Style.pptx
@@ -688,7 +688,7 @@
           <a:p>
             <a:r>
               <a:rPr lang="en-US" dirty="0"/>
-              <a:t>For review with Tommy, not for the room. Every slide built but not placed in the deck: alternate versions of slides already in it, and slides not yet decided on. In deck order: Gross Trend options A / B / B+Q4, Store Records (six designs), Door Rate options A-E, Internal GP %, CP vs Internal GP % options A-B, Headcount trend, Best Techs option C, Who's Moving Now alternate versions, Most Improved v1. Pick what moves into the deck, then delete this section before the meeting.</a:t>
+              <a:t>For review with Tommy, not for the room. Every slide built but not placed in the deck: alternate versions of slides already in it, and slides not yet decided on. In deck order: Gross Trend options A / B / B+Q4, Store Records (six designs), Door Rate options A-B, CP vs Internal GP % options A-B, Headcount trend, Best Techs option C, Who's Moving Now alternate versions, Most Improved v1. Pick what moves into the deck, then delete this section before the meeting.</a:t>
             </a:r>
             <a:endParaRPr lang="en-US" dirty="0"/>
           </a:p>
@@ -2738,7 +2738,7 @@
                 <a:ea typeface="Inter" pitchFamily="34" charset="-122"/>
                 <a:cs typeface="Inter" pitchFamily="34" charset="-120"/>
               </a:rPr>
-              <a:t>Gross &amp; records   ·   Door rate   ·   Internal GP %   ·   Best techs   ·   Most improved</a:t>
+              <a:t>Gross &amp; records   ·   Door rate   ·   CP vs internal   ·   Best techs   ·   Most improved</a:t>
             </a:r>
             <a:endParaRPr lang="en-US" sz="2200" dirty="0"/>
           </a:p>
@@ -3810,7 +3810,7 @@
                 <a:ea typeface="Inter" pitchFamily="34" charset="-122"/>
                 <a:cs typeface="Inter" pitchFamily="34" charset="-120"/>
               </a:rPr>
-              <a:t>Warranty rate increases, audits and compliance, internal rate.</a:t>
+              <a:t>Warranty rate increases, audits and compliance, internal rate and margin.</a:t>
             </a:r>
             <a:endParaRPr lang="en-US" sz="1400" dirty="0"/>
           </a:p>

--- a/day2-deck/decks/Day 2 Opening - Day 1 Style.pptx
+++ b/day2-deck/decks/Day 2 Opening - Day 1 Style.pptx
@@ -2144,7 +2144,7 @@
               <a:buNone/>
             </a:pPr>
             <a:r>
-              <a:rPr lang="en-US" sz="1550" dirty="0">
+              <a:rPr lang="en-US" sz="1700" dirty="0">
                 <a:solidFill>
                   <a:srgbClr val="595959"/>
                 </a:solidFill>
@@ -2154,7 +2154,7 @@
               </a:rPr>
               <a:t>Gross</a:t>
             </a:r>
-            <a:endParaRPr lang="en-US" sz="1550" dirty="0"/>
+            <a:endParaRPr lang="en-US" sz="1700" dirty="0"/>
           </a:p>
         </p:txBody>
       </p:sp>
@@ -2203,7 +2203,7 @@
               <a:buNone/>
             </a:pPr>
             <a:r>
-              <a:rPr lang="en-US" sz="1550" dirty="0">
+              <a:rPr lang="en-US" sz="1700" dirty="0">
                 <a:solidFill>
                   <a:srgbClr val="595959"/>
                 </a:solidFill>
@@ -2213,7 +2213,7 @@
               </a:rPr>
               <a:t>Profitability</a:t>
             </a:r>
-            <a:endParaRPr lang="en-US" sz="1550" dirty="0"/>
+            <a:endParaRPr lang="en-US" sz="1700" dirty="0"/>
           </a:p>
         </p:txBody>
       </p:sp>
@@ -2262,7 +2262,7 @@
               <a:buNone/>
             </a:pPr>
             <a:r>
-              <a:rPr lang="en-US" sz="1550" dirty="0">
+              <a:rPr lang="en-US" sz="1700" dirty="0">
                 <a:solidFill>
                   <a:srgbClr val="595959"/>
                 </a:solidFill>
@@ -2272,7 +2272,7 @@
               </a:rPr>
               <a:t>CP Engine</a:t>
             </a:r>
-            <a:endParaRPr lang="en-US" sz="1550" dirty="0"/>
+            <a:endParaRPr lang="en-US" sz="1700" dirty="0"/>
           </a:p>
         </p:txBody>
       </p:sp>
@@ -2321,7 +2321,7 @@
               <a:buNone/>
             </a:pPr>
             <a:r>
-              <a:rPr lang="en-US" sz="1550" dirty="0">
+              <a:rPr lang="en-US" sz="1700" dirty="0">
                 <a:solidFill>
                   <a:srgbClr val="595959"/>
                 </a:solidFill>
@@ -2331,7 +2331,7 @@
               </a:rPr>
               <a:t>Labor Mix</a:t>
             </a:r>
-            <a:endParaRPr lang="en-US" sz="1550" dirty="0"/>
+            <a:endParaRPr lang="en-US" sz="1700" dirty="0"/>
           </a:p>
         </p:txBody>
       </p:sp>
@@ -2380,7 +2380,7 @@
               <a:buNone/>
             </a:pPr>
             <a:r>
-              <a:rPr lang="en-US" sz="1550" dirty="0">
+              <a:rPr lang="en-US" sz="1700" dirty="0">
                 <a:solidFill>
                   <a:srgbClr val="595959"/>
                 </a:solidFill>
@@ -2390,7 +2390,7 @@
               </a:rPr>
               <a:t>Opcodes</a:t>
             </a:r>
-            <a:endParaRPr lang="en-US" sz="1550" dirty="0"/>
+            <a:endParaRPr lang="en-US" sz="1700" dirty="0"/>
           </a:p>
         </p:txBody>
       </p:sp>
@@ -2439,7 +2439,7 @@
               <a:buNone/>
             </a:pPr>
             <a:r>
-              <a:rPr lang="en-US" sz="1550" dirty="0">
+              <a:rPr lang="en-US" sz="1700" dirty="0">
                 <a:solidFill>
                   <a:srgbClr val="595959"/>
                 </a:solidFill>
@@ -2447,9 +2447,9 @@
                 <a:ea typeface="Inter" pitchFamily="34" charset="-122"/>
                 <a:cs typeface="Inter" pitchFamily="34" charset="-120"/>
               </a:rPr>
-              <a:t>Warranty &amp; Internal</a:t>
-            </a:r>
-            <a:endParaRPr lang="en-US" sz="1550" dirty="0"/>
+              <a:t>Warranty</a:t>
+            </a:r>
+            <a:endParaRPr lang="en-US" sz="1700" dirty="0"/>
           </a:p>
         </p:txBody>
       </p:sp>
@@ -2498,7 +2498,7 @@
               <a:buNone/>
             </a:pPr>
             <a:r>
-              <a:rPr lang="en-US" sz="1550" dirty="0">
+              <a:rPr lang="en-US" sz="1700" dirty="0">
                 <a:solidFill>
                   <a:srgbClr val="595959"/>
                 </a:solidFill>
@@ -2508,7 +2508,7 @@
               </a:rPr>
               <a:t>Productivity</a:t>
             </a:r>
-            <a:endParaRPr lang="en-US" sz="1550" dirty="0"/>
+            <a:endParaRPr lang="en-US" sz="1700" dirty="0"/>
           </a:p>
         </p:txBody>
       </p:sp>
@@ -2557,7 +2557,7 @@
               <a:buNone/>
             </a:pPr>
             <a:r>
-              <a:rPr lang="en-US" sz="1550" b="1" dirty="0">
+              <a:rPr lang="en-US" sz="1700" b="1" dirty="0">
                 <a:solidFill>
                   <a:srgbClr val="1A1A1A"/>
                 </a:solidFill>
@@ -2567,7 +2567,7 @@
               </a:rPr>
               <a:t>Close</a:t>
             </a:r>
-            <a:endParaRPr lang="en-US" sz="1550" dirty="0"/>
+            <a:endParaRPr lang="en-US" sz="1700" dirty="0"/>
           </a:p>
         </p:txBody>
       </p:sp>
@@ -3496,7 +3496,7 @@
                 <a:ea typeface="Inter" pitchFamily="34" charset="-122"/>
                 <a:cs typeface="Inter" pitchFamily="34" charset="-120"/>
               </a:rPr>
-              <a:t>Express, maintenance and repair mix.</a:t>
+              <a:t>Pay type and internal, maintenance and repair mix.</a:t>
             </a:r>
             <a:endParaRPr lang="en-US" sz="1400" dirty="0"/>
           </a:p>
@@ -3771,7 +3771,7 @@
                 <a:ea typeface="Inter" pitchFamily="34" charset="-122"/>
                 <a:cs typeface="Inter" pitchFamily="34" charset="-120"/>
               </a:rPr>
-              <a:t>Warranty &amp; Internal</a:t>
+              <a:t>Warranty</a:t>
             </a:r>
             <a:endParaRPr lang="en-US" sz="1700" dirty="0"/>
           </a:p>
@@ -3810,7 +3810,7 @@
                 <a:ea typeface="Inter" pitchFamily="34" charset="-122"/>
                 <a:cs typeface="Inter" pitchFamily="34" charset="-120"/>
               </a:rPr>
-              <a:t>Warranty rate increases, audits and compliance, internal rate and margin.</a:t>
+              <a:t>Rate increases, warranty rate and parts margin, audits and compliance.</a:t>
             </a:r>
             <a:endParaRPr lang="en-US" sz="1400" dirty="0"/>
           </a:p>
@@ -4348,7 +4348,7 @@
               <a:buNone/>
             </a:pPr>
             <a:r>
-              <a:rPr lang="en-US" sz="1550" b="1" dirty="0">
+              <a:rPr lang="en-US" sz="1700" b="1" dirty="0">
                 <a:solidFill>
                   <a:srgbClr val="1A1A1A"/>
                 </a:solidFill>
@@ -4358,7 +4358,7 @@
               </a:rPr>
               <a:t>Gross</a:t>
             </a:r>
-            <a:endParaRPr lang="en-US" sz="1550" dirty="0"/>
+            <a:endParaRPr lang="en-US" sz="1700" dirty="0"/>
           </a:p>
         </p:txBody>
       </p:sp>
@@ -4407,7 +4407,7 @@
               <a:buNone/>
             </a:pPr>
             <a:r>
-              <a:rPr lang="en-US" sz="1550" dirty="0">
+              <a:rPr lang="en-US" sz="1700" dirty="0">
                 <a:solidFill>
                   <a:srgbClr val="595959"/>
                 </a:solidFill>
@@ -4417,7 +4417,7 @@
               </a:rPr>
               <a:t>Profitability</a:t>
             </a:r>
-            <a:endParaRPr lang="en-US" sz="1550" dirty="0"/>
+            <a:endParaRPr lang="en-US" sz="1700" dirty="0"/>
           </a:p>
         </p:txBody>
       </p:sp>
@@ -4466,7 +4466,7 @@
               <a:buNone/>
             </a:pPr>
             <a:r>
-              <a:rPr lang="en-US" sz="1550" dirty="0">
+              <a:rPr lang="en-US" sz="1700" dirty="0">
                 <a:solidFill>
                   <a:srgbClr val="595959"/>
                 </a:solidFill>
@@ -4476,7 +4476,7 @@
               </a:rPr>
               <a:t>CP Engine</a:t>
             </a:r>
-            <a:endParaRPr lang="en-US" sz="1550" dirty="0"/>
+            <a:endParaRPr lang="en-US" sz="1700" dirty="0"/>
           </a:p>
         </p:txBody>
       </p:sp>
@@ -4525,7 +4525,7 @@
               <a:buNone/>
             </a:pPr>
             <a:r>
-              <a:rPr lang="en-US" sz="1550" dirty="0">
+              <a:rPr lang="en-US" sz="1700" dirty="0">
                 <a:solidFill>
                   <a:srgbClr val="595959"/>
                 </a:solidFill>
@@ -4535,7 +4535,7 @@
               </a:rPr>
               <a:t>Labor Mix</a:t>
             </a:r>
-            <a:endParaRPr lang="en-US" sz="1550" dirty="0"/>
+            <a:endParaRPr lang="en-US" sz="1700" dirty="0"/>
           </a:p>
         </p:txBody>
       </p:sp>
@@ -4584,7 +4584,7 @@
               <a:buNone/>
             </a:pPr>
             <a:r>
-              <a:rPr lang="en-US" sz="1550" dirty="0">
+              <a:rPr lang="en-US" sz="1700" dirty="0">
                 <a:solidFill>
                   <a:srgbClr val="595959"/>
                 </a:solidFill>
@@ -4594,7 +4594,7 @@
               </a:rPr>
               <a:t>Opcodes</a:t>
             </a:r>
-            <a:endParaRPr lang="en-US" sz="1550" dirty="0"/>
+            <a:endParaRPr lang="en-US" sz="1700" dirty="0"/>
           </a:p>
         </p:txBody>
       </p:sp>
@@ -4643,7 +4643,7 @@
               <a:buNone/>
             </a:pPr>
             <a:r>
-              <a:rPr lang="en-US" sz="1550" dirty="0">
+              <a:rPr lang="en-US" sz="1700" dirty="0">
                 <a:solidFill>
                   <a:srgbClr val="595959"/>
                 </a:solidFill>
@@ -4651,9 +4651,9 @@
                 <a:ea typeface="Inter" pitchFamily="34" charset="-122"/>
                 <a:cs typeface="Inter" pitchFamily="34" charset="-120"/>
               </a:rPr>
-              <a:t>Warranty &amp; Internal</a:t>
-            </a:r>
-            <a:endParaRPr lang="en-US" sz="1550" dirty="0"/>
+              <a:t>Warranty</a:t>
+            </a:r>
+            <a:endParaRPr lang="en-US" sz="1700" dirty="0"/>
           </a:p>
         </p:txBody>
       </p:sp>
@@ -4702,7 +4702,7 @@
               <a:buNone/>
             </a:pPr>
             <a:r>
-              <a:rPr lang="en-US" sz="1550" dirty="0">
+              <a:rPr lang="en-US" sz="1700" dirty="0">
                 <a:solidFill>
                   <a:srgbClr val="595959"/>
                 </a:solidFill>
@@ -4712,7 +4712,7 @@
               </a:rPr>
               <a:t>Productivity</a:t>
             </a:r>
-            <a:endParaRPr lang="en-US" sz="1550" dirty="0"/>
+            <a:endParaRPr lang="en-US" sz="1700" dirty="0"/>
           </a:p>
         </p:txBody>
       </p:sp>
@@ -4761,7 +4761,7 @@
               <a:buNone/>
             </a:pPr>
             <a:r>
-              <a:rPr lang="en-US" sz="1550" dirty="0">
+              <a:rPr lang="en-US" sz="1700" dirty="0">
                 <a:solidFill>
                   <a:srgbClr val="595959"/>
                 </a:solidFill>
@@ -4771,7 +4771,7 @@
               </a:rPr>
               <a:t>Close</a:t>
             </a:r>
-            <a:endParaRPr lang="en-US" sz="1550" dirty="0"/>
+            <a:endParaRPr lang="en-US" sz="1700" dirty="0"/>
           </a:p>
         </p:txBody>
       </p:sp>
@@ -4993,7 +4993,7 @@
               <a:buNone/>
             </a:pPr>
             <a:r>
-              <a:rPr lang="en-US" sz="1550" dirty="0">
+              <a:rPr lang="en-US" sz="1700" dirty="0">
                 <a:solidFill>
                   <a:srgbClr val="595959"/>
                 </a:solidFill>
@@ -5003,7 +5003,7 @@
               </a:rPr>
               <a:t>Gross</a:t>
             </a:r>
-            <a:endParaRPr lang="en-US" sz="1550" dirty="0"/>
+            <a:endParaRPr lang="en-US" sz="1700" dirty="0"/>
           </a:p>
         </p:txBody>
       </p:sp>
@@ -5052,7 +5052,7 @@
               <a:buNone/>
             </a:pPr>
             <a:r>
-              <a:rPr lang="en-US" sz="1550" b="1" dirty="0">
+              <a:rPr lang="en-US" sz="1700" b="1" dirty="0">
                 <a:solidFill>
                   <a:srgbClr val="1A1A1A"/>
                 </a:solidFill>
@@ -5062,7 +5062,7 @@
               </a:rPr>
               <a:t>Profitability</a:t>
             </a:r>
-            <a:endParaRPr lang="en-US" sz="1550" dirty="0"/>
+            <a:endParaRPr lang="en-US" sz="1700" dirty="0"/>
           </a:p>
         </p:txBody>
       </p:sp>
@@ -5111,7 +5111,7 @@
               <a:buNone/>
             </a:pPr>
             <a:r>
-              <a:rPr lang="en-US" sz="1550" dirty="0">
+              <a:rPr lang="en-US" sz="1700" dirty="0">
                 <a:solidFill>
                   <a:srgbClr val="595959"/>
                 </a:solidFill>
@@ -5121,7 +5121,7 @@
               </a:rPr>
               <a:t>CP Engine</a:t>
             </a:r>
-            <a:endParaRPr lang="en-US" sz="1550" dirty="0"/>
+            <a:endParaRPr lang="en-US" sz="1700" dirty="0"/>
           </a:p>
         </p:txBody>
       </p:sp>
@@ -5170,7 +5170,7 @@
               <a:buNone/>
             </a:pPr>
             <a:r>
-              <a:rPr lang="en-US" sz="1550" dirty="0">
+              <a:rPr lang="en-US" sz="1700" dirty="0">
                 <a:solidFill>
                   <a:srgbClr val="595959"/>
                 </a:solidFill>
@@ -5180,7 +5180,7 @@
               </a:rPr>
               <a:t>Labor Mix</a:t>
             </a:r>
-            <a:endParaRPr lang="en-US" sz="1550" dirty="0"/>
+            <a:endParaRPr lang="en-US" sz="1700" dirty="0"/>
           </a:p>
         </p:txBody>
       </p:sp>
@@ -5229,7 +5229,7 @@
               <a:buNone/>
             </a:pPr>
             <a:r>
-              <a:rPr lang="en-US" sz="1550" dirty="0">
+              <a:rPr lang="en-US" sz="1700" dirty="0">
                 <a:solidFill>
                   <a:srgbClr val="595959"/>
                 </a:solidFill>
@@ -5239,7 +5239,7 @@
               </a:rPr>
               <a:t>Opcodes</a:t>
             </a:r>
-            <a:endParaRPr lang="en-US" sz="1550" dirty="0"/>
+            <a:endParaRPr lang="en-US" sz="1700" dirty="0"/>
           </a:p>
         </p:txBody>
       </p:sp>
@@ -5288,7 +5288,7 @@
               <a:buNone/>
             </a:pPr>
             <a:r>
-              <a:rPr lang="en-US" sz="1550" dirty="0">
+              <a:rPr lang="en-US" sz="1700" dirty="0">
                 <a:solidFill>
                   <a:srgbClr val="595959"/>
                 </a:solidFill>
@@ -5296,9 +5296,9 @@
                 <a:ea typeface="Inter" pitchFamily="34" charset="-122"/>
                 <a:cs typeface="Inter" pitchFamily="34" charset="-120"/>
               </a:rPr>
-              <a:t>Warranty &amp; Internal</a:t>
-            </a:r>
-            <a:endParaRPr lang="en-US" sz="1550" dirty="0"/>
+              <a:t>Warranty</a:t>
+            </a:r>
+            <a:endParaRPr lang="en-US" sz="1700" dirty="0"/>
           </a:p>
         </p:txBody>
       </p:sp>
@@ -5347,7 +5347,7 @@
               <a:buNone/>
             </a:pPr>
             <a:r>
-              <a:rPr lang="en-US" sz="1550" dirty="0">
+              <a:rPr lang="en-US" sz="1700" dirty="0">
                 <a:solidFill>
                   <a:srgbClr val="595959"/>
                 </a:solidFill>
@@ -5357,7 +5357,7 @@
               </a:rPr>
               <a:t>Productivity</a:t>
             </a:r>
-            <a:endParaRPr lang="en-US" sz="1550" dirty="0"/>
+            <a:endParaRPr lang="en-US" sz="1700" dirty="0"/>
           </a:p>
         </p:txBody>
       </p:sp>
@@ -5406,7 +5406,7 @@
               <a:buNone/>
             </a:pPr>
             <a:r>
-              <a:rPr lang="en-US" sz="1550" dirty="0">
+              <a:rPr lang="en-US" sz="1700" dirty="0">
                 <a:solidFill>
                   <a:srgbClr val="595959"/>
                 </a:solidFill>
@@ -5416,7 +5416,7 @@
               </a:rPr>
               <a:t>Close</a:t>
             </a:r>
-            <a:endParaRPr lang="en-US" sz="1550" dirty="0"/>
+            <a:endParaRPr lang="en-US" sz="1700" dirty="0"/>
           </a:p>
         </p:txBody>
       </p:sp>
@@ -5638,7 +5638,7 @@
               <a:buNone/>
             </a:pPr>
             <a:r>
-              <a:rPr lang="en-US" sz="1550" dirty="0">
+              <a:rPr lang="en-US" sz="1700" dirty="0">
                 <a:solidFill>
                   <a:srgbClr val="595959"/>
                 </a:solidFill>
@@ -5648,7 +5648,7 @@
               </a:rPr>
               <a:t>Gross</a:t>
             </a:r>
-            <a:endParaRPr lang="en-US" sz="1550" dirty="0"/>
+            <a:endParaRPr lang="en-US" sz="1700" dirty="0"/>
           </a:p>
         </p:txBody>
       </p:sp>
@@ -5697,7 +5697,7 @@
               <a:buNone/>
             </a:pPr>
             <a:r>
-              <a:rPr lang="en-US" sz="1550" dirty="0">
+              <a:rPr lang="en-US" sz="1700" dirty="0">
                 <a:solidFill>
                   <a:srgbClr val="595959"/>
                 </a:solidFill>
@@ -5707,7 +5707,7 @@
               </a:rPr>
               <a:t>Profitability</a:t>
             </a:r>
-            <a:endParaRPr lang="en-US" sz="1550" dirty="0"/>
+            <a:endParaRPr lang="en-US" sz="1700" dirty="0"/>
           </a:p>
         </p:txBody>
       </p:sp>
@@ -5756,7 +5756,7 @@
               <a:buNone/>
             </a:pPr>
             <a:r>
-              <a:rPr lang="en-US" sz="1550" b="1" dirty="0">
+              <a:rPr lang="en-US" sz="1700" b="1" dirty="0">
                 <a:solidFill>
                   <a:srgbClr val="1A1A1A"/>
                 </a:solidFill>
@@ -5766,7 +5766,7 @@
               </a:rPr>
               <a:t>CP Engine</a:t>
             </a:r>
-            <a:endParaRPr lang="en-US" sz="1550" dirty="0"/>
+            <a:endParaRPr lang="en-US" sz="1700" dirty="0"/>
           </a:p>
         </p:txBody>
       </p:sp>
@@ -5815,7 +5815,7 @@
               <a:buNone/>
             </a:pPr>
             <a:r>
-              <a:rPr lang="en-US" sz="1550" dirty="0">
+              <a:rPr lang="en-US" sz="1700" dirty="0">
                 <a:solidFill>
                   <a:srgbClr val="595959"/>
                 </a:solidFill>
@@ -5825,7 +5825,7 @@
               </a:rPr>
               <a:t>Labor Mix</a:t>
             </a:r>
-            <a:endParaRPr lang="en-US" sz="1550" dirty="0"/>
+            <a:endParaRPr lang="en-US" sz="1700" dirty="0"/>
           </a:p>
         </p:txBody>
       </p:sp>
@@ -5874,7 +5874,7 @@
               <a:buNone/>
             </a:pPr>
             <a:r>
-              <a:rPr lang="en-US" sz="1550" dirty="0">
+              <a:rPr lang="en-US" sz="1700" dirty="0">
                 <a:solidFill>
                   <a:srgbClr val="595959"/>
                 </a:solidFill>
@@ -5884,7 +5884,7 @@
               </a:rPr>
               <a:t>Opcodes</a:t>
             </a:r>
-            <a:endParaRPr lang="en-US" sz="1550" dirty="0"/>
+            <a:endParaRPr lang="en-US" sz="1700" dirty="0"/>
           </a:p>
         </p:txBody>
       </p:sp>
@@ -5933,7 +5933,7 @@
               <a:buNone/>
             </a:pPr>
             <a:r>
-              <a:rPr lang="en-US" sz="1550" dirty="0">
+              <a:rPr lang="en-US" sz="1700" dirty="0">
                 <a:solidFill>
                   <a:srgbClr val="595959"/>
                 </a:solidFill>
@@ -5941,9 +5941,9 @@
                 <a:ea typeface="Inter" pitchFamily="34" charset="-122"/>
                 <a:cs typeface="Inter" pitchFamily="34" charset="-120"/>
               </a:rPr>
-              <a:t>Warranty &amp; Internal</a:t>
-            </a:r>
-            <a:endParaRPr lang="en-US" sz="1550" dirty="0"/>
+              <a:t>Warranty</a:t>
+            </a:r>
+            <a:endParaRPr lang="en-US" sz="1700" dirty="0"/>
           </a:p>
         </p:txBody>
       </p:sp>
@@ -5992,7 +5992,7 @@
               <a:buNone/>
             </a:pPr>
             <a:r>
-              <a:rPr lang="en-US" sz="1550" dirty="0">
+              <a:rPr lang="en-US" sz="1700" dirty="0">
                 <a:solidFill>
                   <a:srgbClr val="595959"/>
                 </a:solidFill>
@@ -6002,7 +6002,7 @@
               </a:rPr>
               <a:t>Productivity</a:t>
             </a:r>
-            <a:endParaRPr lang="en-US" sz="1550" dirty="0"/>
+            <a:endParaRPr lang="en-US" sz="1700" dirty="0"/>
           </a:p>
         </p:txBody>
       </p:sp>
@@ -6051,7 +6051,7 @@
               <a:buNone/>
             </a:pPr>
             <a:r>
-              <a:rPr lang="en-US" sz="1550" dirty="0">
+              <a:rPr lang="en-US" sz="1700" dirty="0">
                 <a:solidFill>
                   <a:srgbClr val="595959"/>
                 </a:solidFill>
@@ -6061,7 +6061,7 @@
               </a:rPr>
               <a:t>Close</a:t>
             </a:r>
-            <a:endParaRPr lang="en-US" sz="1550" dirty="0"/>
+            <a:endParaRPr lang="en-US" sz="1700" dirty="0"/>
           </a:p>
         </p:txBody>
       </p:sp>
@@ -6232,7 +6232,7 @@
                 <a:ea typeface="Inter" pitchFamily="34" charset="-122"/>
                 <a:cs typeface="Inter" pitchFamily="34" charset="-120"/>
               </a:rPr>
-              <a:t>Pay type   ·   Work type   ·   Op code descriptions</a:t>
+              <a:t>Pay type   ·   Internal rate &amp; margin   ·   Work type   ·   Op code descriptions</a:t>
             </a:r>
             <a:endParaRPr lang="en-US" sz="2200" dirty="0"/>
           </a:p>
@@ -6283,7 +6283,7 @@
               <a:buNone/>
             </a:pPr>
             <a:r>
-              <a:rPr lang="en-US" sz="1550" dirty="0">
+              <a:rPr lang="en-US" sz="1700" dirty="0">
                 <a:solidFill>
                   <a:srgbClr val="595959"/>
                 </a:solidFill>
@@ -6293,7 +6293,7 @@
               </a:rPr>
               <a:t>Gross</a:t>
             </a:r>
-            <a:endParaRPr lang="en-US" sz="1550" dirty="0"/>
+            <a:endParaRPr lang="en-US" sz="1700" dirty="0"/>
           </a:p>
         </p:txBody>
       </p:sp>
@@ -6342,7 +6342,7 @@
               <a:buNone/>
             </a:pPr>
             <a:r>
-              <a:rPr lang="en-US" sz="1550" dirty="0">
+              <a:rPr lang="en-US" sz="1700" dirty="0">
                 <a:solidFill>
                   <a:srgbClr val="595959"/>
                 </a:solidFill>
@@ -6352,7 +6352,7 @@
               </a:rPr>
               <a:t>Profitability</a:t>
             </a:r>
-            <a:endParaRPr lang="en-US" sz="1550" dirty="0"/>
+            <a:endParaRPr lang="en-US" sz="1700" dirty="0"/>
           </a:p>
         </p:txBody>
       </p:sp>
@@ -6401,7 +6401,7 @@
               <a:buNone/>
             </a:pPr>
             <a:r>
-              <a:rPr lang="en-US" sz="1550" dirty="0">
+              <a:rPr lang="en-US" sz="1700" dirty="0">
                 <a:solidFill>
                   <a:srgbClr val="595959"/>
                 </a:solidFill>
@@ -6411,7 +6411,7 @@
               </a:rPr>
               <a:t>CP Engine</a:t>
             </a:r>
-            <a:endParaRPr lang="en-US" sz="1550" dirty="0"/>
+            <a:endParaRPr lang="en-US" sz="1700" dirty="0"/>
           </a:p>
         </p:txBody>
       </p:sp>
@@ -6460,7 +6460,7 @@
               <a:buNone/>
             </a:pPr>
             <a:r>
-              <a:rPr lang="en-US" sz="1550" b="1" dirty="0">
+              <a:rPr lang="en-US" sz="1700" b="1" dirty="0">
                 <a:solidFill>
                   <a:srgbClr val="1A1A1A"/>
                 </a:solidFill>
@@ -6470,7 +6470,7 @@
               </a:rPr>
               <a:t>Labor Mix</a:t>
             </a:r>
-            <a:endParaRPr lang="en-US" sz="1550" dirty="0"/>
+            <a:endParaRPr lang="en-US" sz="1700" dirty="0"/>
           </a:p>
         </p:txBody>
       </p:sp>
@@ -6519,7 +6519,7 @@
               <a:buNone/>
             </a:pPr>
             <a:r>
-              <a:rPr lang="en-US" sz="1550" dirty="0">
+              <a:rPr lang="en-US" sz="1700" dirty="0">
                 <a:solidFill>
                   <a:srgbClr val="595959"/>
                 </a:solidFill>
@@ -6529,7 +6529,7 @@
               </a:rPr>
               <a:t>Opcodes</a:t>
             </a:r>
-            <a:endParaRPr lang="en-US" sz="1550" dirty="0"/>
+            <a:endParaRPr lang="en-US" sz="1700" dirty="0"/>
           </a:p>
         </p:txBody>
       </p:sp>
@@ -6578,7 +6578,7 @@
               <a:buNone/>
             </a:pPr>
             <a:r>
-              <a:rPr lang="en-US" sz="1550" dirty="0">
+              <a:rPr lang="en-US" sz="1700" dirty="0">
                 <a:solidFill>
                   <a:srgbClr val="595959"/>
                 </a:solidFill>
@@ -6586,9 +6586,9 @@
                 <a:ea typeface="Inter" pitchFamily="34" charset="-122"/>
                 <a:cs typeface="Inter" pitchFamily="34" charset="-120"/>
               </a:rPr>
-              <a:t>Warranty &amp; Internal</a:t>
-            </a:r>
-            <a:endParaRPr lang="en-US" sz="1550" dirty="0"/>
+              <a:t>Warranty</a:t>
+            </a:r>
+            <a:endParaRPr lang="en-US" sz="1700" dirty="0"/>
           </a:p>
         </p:txBody>
       </p:sp>
@@ -6637,7 +6637,7 @@
               <a:buNone/>
             </a:pPr>
             <a:r>
-              <a:rPr lang="en-US" sz="1550" dirty="0">
+              <a:rPr lang="en-US" sz="1700" dirty="0">
                 <a:solidFill>
                   <a:srgbClr val="595959"/>
                 </a:solidFill>
@@ -6647,7 +6647,7 @@
               </a:rPr>
               <a:t>Productivity</a:t>
             </a:r>
-            <a:endParaRPr lang="en-US" sz="1550" dirty="0"/>
+            <a:endParaRPr lang="en-US" sz="1700" dirty="0"/>
           </a:p>
         </p:txBody>
       </p:sp>
@@ -6696,7 +6696,7 @@
               <a:buNone/>
             </a:pPr>
             <a:r>
-              <a:rPr lang="en-US" sz="1550" dirty="0">
+              <a:rPr lang="en-US" sz="1700" dirty="0">
                 <a:solidFill>
                   <a:srgbClr val="595959"/>
                 </a:solidFill>
@@ -6706,7 +6706,7 @@
               </a:rPr>
               <a:t>Close</a:t>
             </a:r>
-            <a:endParaRPr lang="en-US" sz="1550" dirty="0"/>
+            <a:endParaRPr lang="en-US" sz="1700" dirty="0"/>
           </a:p>
         </p:txBody>
       </p:sp>
@@ -6928,7 +6928,7 @@
               <a:buNone/>
             </a:pPr>
             <a:r>
-              <a:rPr lang="en-US" sz="1550" dirty="0">
+              <a:rPr lang="en-US" sz="1700" dirty="0">
                 <a:solidFill>
                   <a:srgbClr val="595959"/>
                 </a:solidFill>
@@ -6938,7 +6938,7 @@
               </a:rPr>
               <a:t>Gross</a:t>
             </a:r>
-            <a:endParaRPr lang="en-US" sz="1550" dirty="0"/>
+            <a:endParaRPr lang="en-US" sz="1700" dirty="0"/>
           </a:p>
         </p:txBody>
       </p:sp>
@@ -6987,7 +6987,7 @@
               <a:buNone/>
             </a:pPr>
             <a:r>
-              <a:rPr lang="en-US" sz="1550" dirty="0">
+              <a:rPr lang="en-US" sz="1700" dirty="0">
                 <a:solidFill>
                   <a:srgbClr val="595959"/>
                 </a:solidFill>
@@ -6997,7 +6997,7 @@
               </a:rPr>
               <a:t>Profitability</a:t>
             </a:r>
-            <a:endParaRPr lang="en-US" sz="1550" dirty="0"/>
+            <a:endParaRPr lang="en-US" sz="1700" dirty="0"/>
           </a:p>
         </p:txBody>
       </p:sp>
@@ -7046,7 +7046,7 @@
               <a:buNone/>
             </a:pPr>
             <a:r>
-              <a:rPr lang="en-US" sz="1550" dirty="0">
+              <a:rPr lang="en-US" sz="1700" dirty="0">
                 <a:solidFill>
                   <a:srgbClr val="595959"/>
                 </a:solidFill>
@@ -7056,7 +7056,7 @@
               </a:rPr>
               <a:t>CP Engine</a:t>
             </a:r>
-            <a:endParaRPr lang="en-US" sz="1550" dirty="0"/>
+            <a:endParaRPr lang="en-US" sz="1700" dirty="0"/>
           </a:p>
         </p:txBody>
       </p:sp>
@@ -7105,7 +7105,7 @@
               <a:buNone/>
             </a:pPr>
             <a:r>
-              <a:rPr lang="en-US" sz="1550" dirty="0">
+              <a:rPr lang="en-US" sz="1700" dirty="0">
                 <a:solidFill>
                   <a:srgbClr val="595959"/>
                 </a:solidFill>
@@ -7115,7 +7115,7 @@
               </a:rPr>
               <a:t>Labor Mix</a:t>
             </a:r>
-            <a:endParaRPr lang="en-US" sz="1550" dirty="0"/>
+            <a:endParaRPr lang="en-US" sz="1700" dirty="0"/>
           </a:p>
         </p:txBody>
       </p:sp>
@@ -7164,7 +7164,7 @@
               <a:buNone/>
             </a:pPr>
             <a:r>
-              <a:rPr lang="en-US" sz="1550" b="1" dirty="0">
+              <a:rPr lang="en-US" sz="1700" b="1" dirty="0">
                 <a:solidFill>
                   <a:srgbClr val="1A1A1A"/>
                 </a:solidFill>
@@ -7174,7 +7174,7 @@
               </a:rPr>
               <a:t>Opcodes</a:t>
             </a:r>
-            <a:endParaRPr lang="en-US" sz="1550" dirty="0"/>
+            <a:endParaRPr lang="en-US" sz="1700" dirty="0"/>
           </a:p>
         </p:txBody>
       </p:sp>
@@ -7223,7 +7223,7 @@
               <a:buNone/>
             </a:pPr>
             <a:r>
-              <a:rPr lang="en-US" sz="1550" dirty="0">
+              <a:rPr lang="en-US" sz="1700" dirty="0">
                 <a:solidFill>
                   <a:srgbClr val="595959"/>
                 </a:solidFill>
@@ -7231,9 +7231,9 @@
                 <a:ea typeface="Inter" pitchFamily="34" charset="-122"/>
                 <a:cs typeface="Inter" pitchFamily="34" charset="-120"/>
               </a:rPr>
-              <a:t>Warranty &amp; Internal</a:t>
-            </a:r>
-            <a:endParaRPr lang="en-US" sz="1550" dirty="0"/>
+              <a:t>Warranty</a:t>
+            </a:r>
+            <a:endParaRPr lang="en-US" sz="1700" dirty="0"/>
           </a:p>
         </p:txBody>
       </p:sp>
@@ -7282,7 +7282,7 @@
               <a:buNone/>
             </a:pPr>
             <a:r>
-              <a:rPr lang="en-US" sz="1550" dirty="0">
+              <a:rPr lang="en-US" sz="1700" dirty="0">
                 <a:solidFill>
                   <a:srgbClr val="595959"/>
                 </a:solidFill>
@@ -7292,7 +7292,7 @@
               </a:rPr>
               <a:t>Productivity</a:t>
             </a:r>
-            <a:endParaRPr lang="en-US" sz="1550" dirty="0"/>
+            <a:endParaRPr lang="en-US" sz="1700" dirty="0"/>
           </a:p>
         </p:txBody>
       </p:sp>
@@ -7341,7 +7341,7 @@
               <a:buNone/>
             </a:pPr>
             <a:r>
-              <a:rPr lang="en-US" sz="1550" dirty="0">
+              <a:rPr lang="en-US" sz="1700" dirty="0">
                 <a:solidFill>
                   <a:srgbClr val="595959"/>
                 </a:solidFill>
@@ -7351,7 +7351,7 @@
               </a:rPr>
               <a:t>Close</a:t>
             </a:r>
-            <a:endParaRPr lang="en-US" sz="1550" dirty="0"/>
+            <a:endParaRPr lang="en-US" sz="1700" dirty="0"/>
           </a:p>
         </p:txBody>
       </p:sp>
@@ -7475,7 +7475,7 @@
               <a:buNone/>
             </a:pPr>
             <a:r>
-              <a:rPr lang="en-US" sz="7200" b="1" dirty="0">
+              <a:rPr lang="en-US" sz="7600" b="1" dirty="0">
                 <a:solidFill>
                   <a:srgbClr val="1A1A1A"/>
                 </a:solidFill>
@@ -7483,9 +7483,9 @@
                 <a:ea typeface="Inter" pitchFamily="34" charset="-122"/>
                 <a:cs typeface="Inter" pitchFamily="34" charset="-120"/>
               </a:rPr>
-              <a:t>Warranty &amp; Internal</a:t>
-            </a:r>
-            <a:endParaRPr lang="en-US" sz="7200" dirty="0"/>
+              <a:t>Warranty</a:t>
+            </a:r>
+            <a:endParaRPr lang="en-US" sz="7600" dirty="0"/>
           </a:p>
         </p:txBody>
       </p:sp>
@@ -7522,7 +7522,7 @@
                 <a:ea typeface="Inter" pitchFamily="34" charset="-122"/>
                 <a:cs typeface="Inter" pitchFamily="34" charset="-120"/>
               </a:rPr>
-              <a:t>Rate increases   ·   Warranty audits   ·   Warranty ELR   ·   Internal ELR</a:t>
+              <a:t>Rate increases   ·   Warranty ELR   ·   Parts margin   ·   Warranty audits</a:t>
             </a:r>
             <a:endParaRPr lang="en-US" sz="2200" dirty="0"/>
           </a:p>
@@ -7573,7 +7573,7 @@
               <a:buNone/>
             </a:pPr>
             <a:r>
-              <a:rPr lang="en-US" sz="1550" dirty="0">
+              <a:rPr lang="en-US" sz="1700" dirty="0">
                 <a:solidFill>
                   <a:srgbClr val="595959"/>
                 </a:solidFill>
@@ -7583,7 +7583,7 @@
               </a:rPr>
               <a:t>Gross</a:t>
             </a:r>
-            <a:endParaRPr lang="en-US" sz="1550" dirty="0"/>
+            <a:endParaRPr lang="en-US" sz="1700" dirty="0"/>
           </a:p>
         </p:txBody>
       </p:sp>
@@ -7632,7 +7632,7 @@
               <a:buNone/>
             </a:pPr>
             <a:r>
-              <a:rPr lang="en-US" sz="1550" dirty="0">
+              <a:rPr lang="en-US" sz="1700" dirty="0">
                 <a:solidFill>
                   <a:srgbClr val="595959"/>
                 </a:solidFill>
@@ -7642,7 +7642,7 @@
               </a:rPr>
               <a:t>Profitability</a:t>
             </a:r>
-            <a:endParaRPr lang="en-US" sz="1550" dirty="0"/>
+            <a:endParaRPr lang="en-US" sz="1700" dirty="0"/>
           </a:p>
         </p:txBody>
       </p:sp>
@@ -7691,7 +7691,7 @@
               <a:buNone/>
             </a:pPr>
             <a:r>
-              <a:rPr lang="en-US" sz="1550" dirty="0">
+              <a:rPr lang="en-US" sz="1700" dirty="0">
                 <a:solidFill>
                   <a:srgbClr val="595959"/>
                 </a:solidFill>
@@ -7701,7 +7701,7 @@
               </a:rPr>
               <a:t>CP Engine</a:t>
             </a:r>
-            <a:endParaRPr lang="en-US" sz="1550" dirty="0"/>
+            <a:endParaRPr lang="en-US" sz="1700" dirty="0"/>
           </a:p>
         </p:txBody>
       </p:sp>
@@ -7750,7 +7750,7 @@
               <a:buNone/>
             </a:pPr>
             <a:r>
-              <a:rPr lang="en-US" sz="1550" dirty="0">
+              <a:rPr lang="en-US" sz="1700" dirty="0">
                 <a:solidFill>
                   <a:srgbClr val="595959"/>
                 </a:solidFill>
@@ -7760,7 +7760,7 @@
               </a:rPr>
               <a:t>Labor Mix</a:t>
             </a:r>
-            <a:endParaRPr lang="en-US" sz="1550" dirty="0"/>
+            <a:endParaRPr lang="en-US" sz="1700" dirty="0"/>
           </a:p>
         </p:txBody>
       </p:sp>
@@ -7809,7 +7809,7 @@
               <a:buNone/>
             </a:pPr>
             <a:r>
-              <a:rPr lang="en-US" sz="1550" dirty="0">
+              <a:rPr lang="en-US" sz="1700" dirty="0">
                 <a:solidFill>
                   <a:srgbClr val="595959"/>
                 </a:solidFill>
@@ -7819,7 +7819,7 @@
               </a:rPr>
               <a:t>Opcodes</a:t>
             </a:r>
-            <a:endParaRPr lang="en-US" sz="1550" dirty="0"/>
+            <a:endParaRPr lang="en-US" sz="1700" dirty="0"/>
           </a:p>
         </p:txBody>
       </p:sp>
@@ -7868,7 +7868,7 @@
               <a:buNone/>
             </a:pPr>
             <a:r>
-              <a:rPr lang="en-US" sz="1550" b="1" dirty="0">
+              <a:rPr lang="en-US" sz="1700" b="1" dirty="0">
                 <a:solidFill>
                   <a:srgbClr val="1A1A1A"/>
                 </a:solidFill>
@@ -7876,9 +7876,9 @@
                 <a:ea typeface="Inter" pitchFamily="34" charset="-122"/>
                 <a:cs typeface="Inter" pitchFamily="34" charset="-120"/>
               </a:rPr>
-              <a:t>Warranty &amp; Internal</a:t>
-            </a:r>
-            <a:endParaRPr lang="en-US" sz="1550" dirty="0"/>
+              <a:t>Warranty</a:t>
+            </a:r>
+            <a:endParaRPr lang="en-US" sz="1700" dirty="0"/>
           </a:p>
         </p:txBody>
       </p:sp>
@@ -7927,7 +7927,7 @@
               <a:buNone/>
             </a:pPr>
             <a:r>
-              <a:rPr lang="en-US" sz="1550" dirty="0">
+              <a:rPr lang="en-US" sz="1700" dirty="0">
                 <a:solidFill>
                   <a:srgbClr val="595959"/>
                 </a:solidFill>
@@ -7937,7 +7937,7 @@
               </a:rPr>
               <a:t>Productivity</a:t>
             </a:r>
-            <a:endParaRPr lang="en-US" sz="1550" dirty="0"/>
+            <a:endParaRPr lang="en-US" sz="1700" dirty="0"/>
           </a:p>
         </p:txBody>
       </p:sp>
@@ -7986,7 +7986,7 @@
               <a:buNone/>
             </a:pPr>
             <a:r>
-              <a:rPr lang="en-US" sz="1550" dirty="0">
+              <a:rPr lang="en-US" sz="1700" dirty="0">
                 <a:solidFill>
                   <a:srgbClr val="595959"/>
                 </a:solidFill>
@@ -7996,7 +7996,7 @@
               </a:rPr>
               <a:t>Close</a:t>
             </a:r>
-            <a:endParaRPr lang="en-US" sz="1550" dirty="0"/>
+            <a:endParaRPr lang="en-US" sz="1700" dirty="0"/>
           </a:p>
         </p:txBody>
       </p:sp>
@@ -8218,7 +8218,7 @@
               <a:buNone/>
             </a:pPr>
             <a:r>
-              <a:rPr lang="en-US" sz="1550" dirty="0">
+              <a:rPr lang="en-US" sz="1700" dirty="0">
                 <a:solidFill>
                   <a:srgbClr val="595959"/>
                 </a:solidFill>
@@ -8228,7 +8228,7 @@
               </a:rPr>
               <a:t>Gross</a:t>
             </a:r>
-            <a:endParaRPr lang="en-US" sz="1550" dirty="0"/>
+            <a:endParaRPr lang="en-US" sz="1700" dirty="0"/>
           </a:p>
         </p:txBody>
       </p:sp>
@@ -8277,7 +8277,7 @@
               <a:buNone/>
             </a:pPr>
             <a:r>
-              <a:rPr lang="en-US" sz="1550" dirty="0">
+              <a:rPr lang="en-US" sz="1700" dirty="0">
                 <a:solidFill>
                   <a:srgbClr val="595959"/>
                 </a:solidFill>
@@ -8287,7 +8287,7 @@
               </a:rPr>
               <a:t>Profitability</a:t>
             </a:r>
-            <a:endParaRPr lang="en-US" sz="1550" dirty="0"/>
+            <a:endParaRPr lang="en-US" sz="1700" dirty="0"/>
           </a:p>
         </p:txBody>
       </p:sp>
@@ -8336,7 +8336,7 @@
               <a:buNone/>
             </a:pPr>
             <a:r>
-              <a:rPr lang="en-US" sz="1550" dirty="0">
+              <a:rPr lang="en-US" sz="1700" dirty="0">
                 <a:solidFill>
                   <a:srgbClr val="595959"/>
                 </a:solidFill>
@@ -8346,7 +8346,7 @@
               </a:rPr>
               <a:t>CP Engine</a:t>
             </a:r>
-            <a:endParaRPr lang="en-US" sz="1550" dirty="0"/>
+            <a:endParaRPr lang="en-US" sz="1700" dirty="0"/>
           </a:p>
         </p:txBody>
       </p:sp>
@@ -8395,7 +8395,7 @@
               <a:buNone/>
             </a:pPr>
             <a:r>
-              <a:rPr lang="en-US" sz="1550" dirty="0">
+              <a:rPr lang="en-US" sz="1700" dirty="0">
                 <a:solidFill>
                   <a:srgbClr val="595959"/>
                 </a:solidFill>
@@ -8405,7 +8405,7 @@
               </a:rPr>
               <a:t>Labor Mix</a:t>
             </a:r>
-            <a:endParaRPr lang="en-US" sz="1550" dirty="0"/>
+            <a:endParaRPr lang="en-US" sz="1700" dirty="0"/>
           </a:p>
         </p:txBody>
       </p:sp>
@@ -8454,7 +8454,7 @@
               <a:buNone/>
             </a:pPr>
             <a:r>
-              <a:rPr lang="en-US" sz="1550" dirty="0">
+              <a:rPr lang="en-US" sz="1700" dirty="0">
                 <a:solidFill>
                   <a:srgbClr val="595959"/>
                 </a:solidFill>
@@ -8464,7 +8464,7 @@
               </a:rPr>
               <a:t>Opcodes</a:t>
             </a:r>
-            <a:endParaRPr lang="en-US" sz="1550" dirty="0"/>
+            <a:endParaRPr lang="en-US" sz="1700" dirty="0"/>
           </a:p>
         </p:txBody>
       </p:sp>
@@ -8513,7 +8513,7 @@
               <a:buNone/>
             </a:pPr>
             <a:r>
-              <a:rPr lang="en-US" sz="1550" dirty="0">
+              <a:rPr lang="en-US" sz="1700" dirty="0">
                 <a:solidFill>
                   <a:srgbClr val="595959"/>
                 </a:solidFill>
@@ -8521,9 +8521,9 @@
                 <a:ea typeface="Inter" pitchFamily="34" charset="-122"/>
                 <a:cs typeface="Inter" pitchFamily="34" charset="-120"/>
               </a:rPr>
-              <a:t>Warranty &amp; Internal</a:t>
-            </a:r>
-            <a:endParaRPr lang="en-US" sz="1550" dirty="0"/>
+              <a:t>Warranty</a:t>
+            </a:r>
+            <a:endParaRPr lang="en-US" sz="1700" dirty="0"/>
           </a:p>
         </p:txBody>
       </p:sp>
@@ -8572,7 +8572,7 @@
               <a:buNone/>
             </a:pPr>
             <a:r>
-              <a:rPr lang="en-US" sz="1550" b="1" dirty="0">
+              <a:rPr lang="en-US" sz="1700" b="1" dirty="0">
                 <a:solidFill>
                   <a:srgbClr val="1A1A1A"/>
                 </a:solidFill>
@@ -8582,7 +8582,7 @@
               </a:rPr>
               <a:t>Productivity</a:t>
             </a:r>
-            <a:endParaRPr lang="en-US" sz="1550" dirty="0"/>
+            <a:endParaRPr lang="en-US" sz="1700" dirty="0"/>
           </a:p>
         </p:txBody>
       </p:sp>
@@ -8631,7 +8631,7 @@
               <a:buNone/>
             </a:pPr>
             <a:r>
-              <a:rPr lang="en-US" sz="1550" dirty="0">
+              <a:rPr lang="en-US" sz="1700" dirty="0">
                 <a:solidFill>
                   <a:srgbClr val="595959"/>
                 </a:solidFill>
@@ -8641,7 +8641,7 @@
               </a:rPr>
               <a:t>Close</a:t>
             </a:r>
-            <a:endParaRPr lang="en-US" sz="1550" dirty="0"/>
+            <a:endParaRPr lang="en-US" sz="1700" dirty="0"/>
           </a:p>
         </p:txBody>
       </p:sp>

--- a/day2-deck/decks/Day 2 Opening - Day 1 Style.pptx
+++ b/day2-deck/decks/Day 2 Opening - Day 1 Style.pptx
@@ -688,7 +688,7 @@
           <a:p>
             <a:r>
               <a:rPr lang="en-US" dirty="0"/>
-              <a:t>For review with Tommy, not for the room. Every slide built but not placed in the deck: alternate versions of slides already in it, and slides not yet decided on. In deck order: Gross Trend options A / B / B+Q4, Store Records (six designs), Door Rate options A-B, CP vs Internal GP % options A-B, Headcount trend, Best Techs option C, Who's Moving Now alternate versions, Most Improved v1. Pick what moves into the deck, then delete this section before the meeting.</a:t>
+              <a:t>For review with Tommy, not for the room. Every slide built but not placed in the deck: alternate versions of slides already in it, and slides not yet decided on. In deck order: Gross Trend options A / B / B+Q4, Store Records (six designs), Door Rate options A-B, CP vs Internal GP % options A-B, Photo completion % (optional measure), Headcount trend, Best Techs option C, Who's Moving Now alternate versions, Most Improved v1. Pick what moves into the deck, then delete this section before the meeting.</a:t>
             </a:r>
             <a:endParaRPr lang="en-US" dirty="0"/>
           </a:p>
@@ -2738,7 +2738,7 @@
                 <a:ea typeface="Inter" pitchFamily="34" charset="-122"/>
                 <a:cs typeface="Inter" pitchFamily="34" charset="-120"/>
               </a:rPr>
-              <a:t>Gross &amp; records   ·   Door rate   ·   CP vs internal   ·   Best techs   ·   Most improved</a:t>
+              <a:t>Trends &amp; records   ·   Door rate   ·   CP vs internal   ·   Photo %   ·   Best techs</a:t>
             </a:r>
             <a:endParaRPr lang="en-US" sz="2200" dirty="0"/>
           </a:p>
@@ -3653,7 +3653,7 @@
                 <a:ea typeface="Inter" pitchFamily="34" charset="-122"/>
                 <a:cs typeface="Inter" pitchFamily="34" charset="-120"/>
               </a:rPr>
-              <a:t>Alignment, balance, brake fluid and fuel.</a:t>
+              <a:t>MPI and video, then alignment, balance, brake fluid and fuel.</a:t>
             </a:r>
             <a:endParaRPr lang="en-US" sz="1400" dirty="0"/>
           </a:p>
@@ -6877,7 +6877,7 @@
                 <a:ea typeface="Inter" pitchFamily="34" charset="-122"/>
                 <a:cs typeface="Inter" pitchFamily="34" charset="-120"/>
               </a:rPr>
-              <a:t>Alignment 15%   ·   Balance 15%   ·   Brake fluid 10%   ·   Fuel service 7.5%</a:t>
+              <a:t>MPI 90%   ·   Alignment 15%   ·   Balance 15%   ·   Brake fluid 10%   ·   Fuel 7.5%</a:t>
             </a:r>
             <a:endParaRPr lang="en-US" sz="2200" dirty="0"/>
           </a:p>

--- a/day2-deck/decks/Day 2 Opening - Day 1 Style.pptx
+++ b/day2-deck/decks/Day 2 Opening - Day 1 Style.pptx
@@ -688,7 +688,7 @@
           <a:p>
             <a:r>
               <a:rPr lang="en-US" dirty="0"/>
-              <a:t>For review with Tommy, not for the room. Every slide built but not placed in the deck: alternate versions of slides already in it, and slides not yet decided on. In deck order: Gross Trend options A / B / B+Q4, Store Records (six designs), Door Rate options A-B, CP vs Internal GP % options A-B, Photo completion % (optional measure), Headcount trend, Best Techs option C, Who's Moving Now alternate versions, Most Improved v1. Pick what moves into the deck, then delete this section before the meeting.</a:t>
+              <a:t>For review with Tommy, not for the room. Every slide built but not placed in the deck: alternate versions of slides already in it, and slides not yet decided on. In deck order: Gross Trend option A parts table and option B+Q4, Store Records (five designs), Door Rate option A, CP vs Internal GP % option A, Photo completion % (optional measure), Best Techs option C, Who's Moving Now alternate versions, Most Improved v1. Pick what moves into the deck, then delete this section before the meeting.</a:t>
             </a:r>
             <a:endParaRPr lang="en-US" dirty="0"/>
           </a:p>

--- a/day2-deck/decks/Day 2 Opening - Day 1 Style.pptx
+++ b/day2-deck/decks/Day 2 Opening - Day 1 Style.pptx
@@ -2270,7 +2270,7 @@
                 <a:ea typeface="Inter" pitchFamily="34" charset="-122"/>
                 <a:cs typeface="Inter" pitchFamily="34" charset="-120"/>
               </a:rPr>
-              <a:t>CP Engine</a:t>
+              <a:t>Customer Pay</a:t>
             </a:r>
             <a:endParaRPr lang="en-US" sz="1700" dirty="0"/>
           </a:p>
@@ -3300,7 +3300,7 @@
                 <a:ea typeface="Inter" pitchFamily="34" charset="-122"/>
                 <a:cs typeface="Inter" pitchFamily="34" charset="-120"/>
               </a:rPr>
-              <a:t>The CP Engine</a:t>
+              <a:t>Customer Pay</a:t>
             </a:r>
             <a:endParaRPr lang="en-US" sz="1700" dirty="0"/>
           </a:p>
@@ -4474,7 +4474,7 @@
                 <a:ea typeface="Inter" pitchFamily="34" charset="-122"/>
                 <a:cs typeface="Inter" pitchFamily="34" charset="-120"/>
               </a:rPr>
-              <a:t>CP Engine</a:t>
+              <a:t>Customer Pay</a:t>
             </a:r>
             <a:endParaRPr lang="en-US" sz="1700" dirty="0"/>
           </a:p>
@@ -5119,7 +5119,7 @@
                 <a:ea typeface="Inter" pitchFamily="34" charset="-122"/>
                 <a:cs typeface="Inter" pitchFamily="34" charset="-120"/>
               </a:rPr>
-              <a:t>CP Engine</a:t>
+              <a:t>Customer Pay</a:t>
             </a:r>
             <a:endParaRPr lang="en-US" sz="1700" dirty="0"/>
           </a:p>
@@ -5548,7 +5548,7 @@
                 <a:ea typeface="Inter" pitchFamily="34" charset="-122"/>
                 <a:cs typeface="Inter" pitchFamily="34" charset="-120"/>
               </a:rPr>
-              <a:t>The CP Engine</a:t>
+              <a:t>Customer Pay</a:t>
             </a:r>
             <a:endParaRPr lang="en-US" sz="7600" dirty="0"/>
           </a:p>
@@ -5764,7 +5764,7 @@
                 <a:ea typeface="Inter" pitchFamily="34" charset="-122"/>
                 <a:cs typeface="Inter" pitchFamily="34" charset="-120"/>
               </a:rPr>
-              <a:t>CP Engine</a:t>
+              <a:t>Customer Pay</a:t>
             </a:r>
             <a:endParaRPr lang="en-US" sz="1700" dirty="0"/>
           </a:p>
@@ -6409,7 +6409,7 @@
                 <a:ea typeface="Inter" pitchFamily="34" charset="-122"/>
                 <a:cs typeface="Inter" pitchFamily="34" charset="-120"/>
               </a:rPr>
-              <a:t>CP Engine</a:t>
+              <a:t>Customer Pay</a:t>
             </a:r>
             <a:endParaRPr lang="en-US" sz="1700" dirty="0"/>
           </a:p>
@@ -7054,7 +7054,7 @@
                 <a:ea typeface="Inter" pitchFamily="34" charset="-122"/>
                 <a:cs typeface="Inter" pitchFamily="34" charset="-120"/>
               </a:rPr>
-              <a:t>CP Engine</a:t>
+              <a:t>Customer Pay</a:t>
             </a:r>
             <a:endParaRPr lang="en-US" sz="1700" dirty="0"/>
           </a:p>
@@ -7699,7 +7699,7 @@
                 <a:ea typeface="Inter" pitchFamily="34" charset="-122"/>
                 <a:cs typeface="Inter" pitchFamily="34" charset="-120"/>
               </a:rPr>
-              <a:t>CP Engine</a:t>
+              <a:t>Customer Pay</a:t>
             </a:r>
             <a:endParaRPr lang="en-US" sz="1700" dirty="0"/>
           </a:p>
@@ -8344,7 +8344,7 @@
                 <a:ea typeface="Inter" pitchFamily="34" charset="-122"/>
                 <a:cs typeface="Inter" pitchFamily="34" charset="-120"/>
               </a:rPr>
-              <a:t>CP Engine</a:t>
+              <a:t>Customer Pay</a:t>
             </a:r>
             <a:endParaRPr lang="en-US" sz="1700" dirty="0"/>
           </a:p>

--- a/day2-deck/decks/Day 2 Opening - Day 1 Style.pptx
+++ b/day2-deck/decks/Day 2 Opening - Day 1 Style.pptx
@@ -688,7 +688,7 @@
           <a:p>
             <a:r>
               <a:rPr lang="en-US" dirty="0"/>
-              <a:t>For review with Tommy, not for the room. Every slide built but not placed in the deck: alternate versions of slides already in it, and slides not yet decided on. In deck order: Gross Trend option A parts table and option B+Q4, Store Records (five designs), Door Rate option A, CP vs Internal GP % option A, Photo completion % (optional measure), Best Techs option C, Who's Moving Now alternate versions, Most Improved v1. Pick what moves into the deck, then delete this section before the meeting.</a:t>
+              <a:t>For review with Tommy, not for the room. Every slide built but not placed in the deck: alternate versions of slides already in it, and slides not yet decided on. In deck order: Gross Trend option A parts table and option B+Q4, Store Records (five designs), Door Rate option A, CP vs Internal GP % option A, Photo completion % (optional measure), Who's Moving Now alternate versions, Most Improved v1. Pick what moves into the deck, then delete this section before the meeting.</a:t>
             </a:r>
             <a:endParaRPr lang="en-US" dirty="0"/>
           </a:p>
@@ -2738,7 +2738,7 @@
                 <a:ea typeface="Inter" pitchFamily="34" charset="-122"/>
                 <a:cs typeface="Inter" pitchFamily="34" charset="-120"/>
               </a:rPr>
-              <a:t>Trends &amp; records   ·   Door rate   ·   CP vs internal   ·   Photo %   ·   Best techs</a:t>
+              <a:t>Trends &amp; records   ·   Door rate   ·   CP vs internal   ·   Photo %   ·   Most improved</a:t>
             </a:r>
             <a:endParaRPr lang="en-US" sz="2200" dirty="0"/>
           </a:p>

--- a/day2-deck/decks/Day 2 Opening - Day 1 Style.pptx
+++ b/day2-deck/decks/Day 2 Opening - Day 1 Style.pptx
@@ -688,7 +688,7 @@
           <a:p>
             <a:r>
               <a:rPr lang="en-US" dirty="0"/>
-              <a:t>For review with Tommy, not for the room. Every slide built but not placed in the deck: alternate versions of slides already in it, and slides not yet decided on. In deck order: Gross Trend option A parts table and option B+Q4, Store Records (five designs), Door Rate option A, CP vs Internal GP % option A, Photo completion % (optional measure), Who's Moving Now alternate versions, Most Improved v1. Pick what moves into the deck, then delete this section before the meeting.</a:t>
+              <a:t>For review with Tommy, not for the room. Every slide built but not placed in the deck: alternate versions of slides already in it, and slides not yet decided on. In deck order: Store Records (five designs), Door Rate option A, CP vs Internal GP % option A, Photo completion % (optional measure), Who's Moving Now alternate versions, Most Improved v1. Pick what moves into the deck, then delete this section before the meeting.</a:t>
             </a:r>
             <a:endParaRPr lang="en-US" dirty="0"/>
           </a:p>
@@ -2738,7 +2738,7 @@
                 <a:ea typeface="Inter" pitchFamily="34" charset="-122"/>
                 <a:cs typeface="Inter" pitchFamily="34" charset="-120"/>
               </a:rPr>
-              <a:t>Trends &amp; records   ·   Door rate   ·   CP vs internal   ·   Photo %   ·   Most improved</a:t>
+              <a:t>Store records   ·   Door rate   ·   CP vs internal   ·   Photo %   ·   Most improved</a:t>
             </a:r>
             <a:endParaRPr lang="en-US" sz="2200" dirty="0"/>
           </a:p>

--- a/day2-deck/decks/Day 2 Opening - Day 1 Style.pptx
+++ b/day2-deck/decks/Day 2 Opening - Day 1 Style.pptx
@@ -2329,7 +2329,7 @@
                 <a:ea typeface="Inter" pitchFamily="34" charset="-122"/>
                 <a:cs typeface="Inter" pitchFamily="34" charset="-120"/>
               </a:rPr>
-              <a:t>Labor Mix</a:t>
+              <a:t>Opcodes</a:t>
             </a:r>
             <a:endParaRPr lang="en-US" sz="1700" dirty="0"/>
           </a:p>
@@ -2388,7 +2388,7 @@
                 <a:ea typeface="Inter" pitchFamily="34" charset="-122"/>
                 <a:cs typeface="Inter" pitchFamily="34" charset="-120"/>
               </a:rPr>
-              <a:t>Opcodes</a:t>
+              <a:t>Labor Mix</a:t>
             </a:r>
             <a:endParaRPr lang="en-US" sz="1700" dirty="0"/>
           </a:p>
@@ -2447,7 +2447,7 @@
                 <a:ea typeface="Inter" pitchFamily="34" charset="-122"/>
                 <a:cs typeface="Inter" pitchFamily="34" charset="-120"/>
               </a:rPr>
-              <a:t>Warranty</a:t>
+              <a:t>Productivity</a:t>
             </a:r>
             <a:endParaRPr lang="en-US" sz="1700" dirty="0"/>
           </a:p>
@@ -2506,7 +2506,7 @@
                 <a:ea typeface="Inter" pitchFamily="34" charset="-122"/>
                 <a:cs typeface="Inter" pitchFamily="34" charset="-120"/>
               </a:rPr>
-              <a:t>Productivity</a:t>
+              <a:t>Warranty</a:t>
             </a:r>
             <a:endParaRPr lang="en-US" sz="1700" dirty="0"/>
           </a:p>
@@ -3457,7 +3457,7 @@
                 <a:ea typeface="Inter" pitchFamily="34" charset="-122"/>
                 <a:cs typeface="Inter" pitchFamily="34" charset="-120"/>
               </a:rPr>
-              <a:t>Labor Mix</a:t>
+              <a:t>Opcode Benchmarks</a:t>
             </a:r>
             <a:endParaRPr lang="en-US" sz="1700" dirty="0"/>
           </a:p>
@@ -3496,7 +3496,7 @@
                 <a:ea typeface="Inter" pitchFamily="34" charset="-122"/>
                 <a:cs typeface="Inter" pitchFamily="34" charset="-120"/>
               </a:rPr>
-              <a:t>Pay type and internal, maintenance and repair mix.</a:t>
+              <a:t>MPI and video, then alignment, balance, brake fluid and fuel.</a:t>
             </a:r>
             <a:endParaRPr lang="en-US" sz="1400" dirty="0"/>
           </a:p>
@@ -3614,7 +3614,7 @@
                 <a:ea typeface="Inter" pitchFamily="34" charset="-122"/>
                 <a:cs typeface="Inter" pitchFamily="34" charset="-120"/>
               </a:rPr>
-              <a:t>Opcode Benchmarks</a:t>
+              <a:t>Labor Mix</a:t>
             </a:r>
             <a:endParaRPr lang="en-US" sz="1700" dirty="0"/>
           </a:p>
@@ -3653,7 +3653,7 @@
                 <a:ea typeface="Inter" pitchFamily="34" charset="-122"/>
                 <a:cs typeface="Inter" pitchFamily="34" charset="-120"/>
               </a:rPr>
-              <a:t>MPI and video, then alignment, balance, brake fluid and fuel.</a:t>
+              <a:t>Pay type and internal, maintenance and repair mix.</a:t>
             </a:r>
             <a:endParaRPr lang="en-US" sz="1400" dirty="0"/>
           </a:p>
@@ -3771,7 +3771,7 @@
                 <a:ea typeface="Inter" pitchFamily="34" charset="-122"/>
                 <a:cs typeface="Inter" pitchFamily="34" charset="-120"/>
               </a:rPr>
-              <a:t>Warranty</a:t>
+              <a:t>Productivity</a:t>
             </a:r>
             <a:endParaRPr lang="en-US" sz="1700" dirty="0"/>
           </a:p>
@@ -3810,7 +3810,7 @@
                 <a:ea typeface="Inter" pitchFamily="34" charset="-122"/>
                 <a:cs typeface="Inter" pitchFamily="34" charset="-120"/>
               </a:rPr>
-              <a:t>Rate increases, warranty rate and parts margin, audits and compliance.</a:t>
+              <a:t>Gross per employee, headcount and technician proficiency.</a:t>
             </a:r>
             <a:endParaRPr lang="en-US" sz="1400" dirty="0"/>
           </a:p>
@@ -3928,7 +3928,7 @@
                 <a:ea typeface="Inter" pitchFamily="34" charset="-122"/>
                 <a:cs typeface="Inter" pitchFamily="34" charset="-120"/>
               </a:rPr>
-              <a:t>Productivity</a:t>
+              <a:t>Warranty</a:t>
             </a:r>
             <a:endParaRPr lang="en-US" sz="1700" dirty="0"/>
           </a:p>
@@ -3967,7 +3967,7 @@
                 <a:ea typeface="Inter" pitchFamily="34" charset="-122"/>
                 <a:cs typeface="Inter" pitchFamily="34" charset="-120"/>
               </a:rPr>
-              <a:t>Gross per employee, headcount and technician proficiency.</a:t>
+              <a:t>Rate increases, warranty rate and parts margin, audits and compliance.</a:t>
             </a:r>
             <a:endParaRPr lang="en-US" sz="1400" dirty="0"/>
           </a:p>
@@ -4533,7 +4533,7 @@
                 <a:ea typeface="Inter" pitchFamily="34" charset="-122"/>
                 <a:cs typeface="Inter" pitchFamily="34" charset="-120"/>
               </a:rPr>
-              <a:t>Labor Mix</a:t>
+              <a:t>Opcodes</a:t>
             </a:r>
             <a:endParaRPr lang="en-US" sz="1700" dirty="0"/>
           </a:p>
@@ -4592,7 +4592,7 @@
                 <a:ea typeface="Inter" pitchFamily="34" charset="-122"/>
                 <a:cs typeface="Inter" pitchFamily="34" charset="-120"/>
               </a:rPr>
-              <a:t>Opcodes</a:t>
+              <a:t>Labor Mix</a:t>
             </a:r>
             <a:endParaRPr lang="en-US" sz="1700" dirty="0"/>
           </a:p>
@@ -4651,7 +4651,7 @@
                 <a:ea typeface="Inter" pitchFamily="34" charset="-122"/>
                 <a:cs typeface="Inter" pitchFamily="34" charset="-120"/>
               </a:rPr>
-              <a:t>Warranty</a:t>
+              <a:t>Productivity</a:t>
             </a:r>
             <a:endParaRPr lang="en-US" sz="1700" dirty="0"/>
           </a:p>
@@ -4710,7 +4710,7 @@
                 <a:ea typeface="Inter" pitchFamily="34" charset="-122"/>
                 <a:cs typeface="Inter" pitchFamily="34" charset="-120"/>
               </a:rPr>
-              <a:t>Productivity</a:t>
+              <a:t>Warranty</a:t>
             </a:r>
             <a:endParaRPr lang="en-US" sz="1700" dirty="0"/>
           </a:p>
@@ -5178,7 +5178,7 @@
                 <a:ea typeface="Inter" pitchFamily="34" charset="-122"/>
                 <a:cs typeface="Inter" pitchFamily="34" charset="-120"/>
               </a:rPr>
-              <a:t>Labor Mix</a:t>
+              <a:t>Opcodes</a:t>
             </a:r>
             <a:endParaRPr lang="en-US" sz="1700" dirty="0"/>
           </a:p>
@@ -5237,7 +5237,7 @@
                 <a:ea typeface="Inter" pitchFamily="34" charset="-122"/>
                 <a:cs typeface="Inter" pitchFamily="34" charset="-120"/>
               </a:rPr>
-              <a:t>Opcodes</a:t>
+              <a:t>Labor Mix</a:t>
             </a:r>
             <a:endParaRPr lang="en-US" sz="1700" dirty="0"/>
           </a:p>
@@ -5296,7 +5296,7 @@
                 <a:ea typeface="Inter" pitchFamily="34" charset="-122"/>
                 <a:cs typeface="Inter" pitchFamily="34" charset="-120"/>
               </a:rPr>
-              <a:t>Warranty</a:t>
+              <a:t>Productivity</a:t>
             </a:r>
             <a:endParaRPr lang="en-US" sz="1700" dirty="0"/>
           </a:p>
@@ -5355,7 +5355,7 @@
                 <a:ea typeface="Inter" pitchFamily="34" charset="-122"/>
                 <a:cs typeface="Inter" pitchFamily="34" charset="-120"/>
               </a:rPr>
-              <a:t>Productivity</a:t>
+              <a:t>Warranty</a:t>
             </a:r>
             <a:endParaRPr lang="en-US" sz="1700" dirty="0"/>
           </a:p>
@@ -5823,7 +5823,7 @@
                 <a:ea typeface="Inter" pitchFamily="34" charset="-122"/>
                 <a:cs typeface="Inter" pitchFamily="34" charset="-120"/>
               </a:rPr>
-              <a:t>Labor Mix</a:t>
+              <a:t>Opcodes</a:t>
             </a:r>
             <a:endParaRPr lang="en-US" sz="1700" dirty="0"/>
           </a:p>
@@ -5882,7 +5882,7 @@
                 <a:ea typeface="Inter" pitchFamily="34" charset="-122"/>
                 <a:cs typeface="Inter" pitchFamily="34" charset="-120"/>
               </a:rPr>
-              <a:t>Opcodes</a:t>
+              <a:t>Labor Mix</a:t>
             </a:r>
             <a:endParaRPr lang="en-US" sz="1700" dirty="0"/>
           </a:p>
@@ -5941,7 +5941,7 @@
                 <a:ea typeface="Inter" pitchFamily="34" charset="-122"/>
                 <a:cs typeface="Inter" pitchFamily="34" charset="-120"/>
               </a:rPr>
-              <a:t>Warranty</a:t>
+              <a:t>Productivity</a:t>
             </a:r>
             <a:endParaRPr lang="en-US" sz="1700" dirty="0"/>
           </a:p>
@@ -6000,7 +6000,7 @@
                 <a:ea typeface="Inter" pitchFamily="34" charset="-122"/>
                 <a:cs typeface="Inter" pitchFamily="34" charset="-120"/>
               </a:rPr>
-              <a:t>Productivity</a:t>
+              <a:t>Warranty</a:t>
             </a:r>
             <a:endParaRPr lang="en-US" sz="1700" dirty="0"/>
           </a:p>
@@ -6193,7 +6193,7 @@
                 <a:ea typeface="Inter" pitchFamily="34" charset="-122"/>
                 <a:cs typeface="Inter" pitchFamily="34" charset="-120"/>
               </a:rPr>
-              <a:t>Labor Mix</a:t>
+              <a:t>Opcode Benchmarks</a:t>
             </a:r>
             <a:endParaRPr lang="en-US" sz="7600" dirty="0"/>
           </a:p>
@@ -6232,7 +6232,7 @@
                 <a:ea typeface="Inter" pitchFamily="34" charset="-122"/>
                 <a:cs typeface="Inter" pitchFamily="34" charset="-120"/>
               </a:rPr>
-              <a:t>Pay type   ·   Internal rate &amp; margin   ·   Work type   ·   Op code descriptions</a:t>
+              <a:t>MPI 90%   ·   Alignment 15%   ·   Balance 15%   ·   Brake fluid 10%   ·   Fuel 7.5%</a:t>
             </a:r>
             <a:endParaRPr lang="en-US" sz="2200" dirty="0"/>
           </a:p>
@@ -6468,7 +6468,7 @@
                 <a:ea typeface="Inter" pitchFamily="34" charset="-122"/>
                 <a:cs typeface="Inter" pitchFamily="34" charset="-120"/>
               </a:rPr>
-              <a:t>Labor Mix</a:t>
+              <a:t>Opcodes</a:t>
             </a:r>
             <a:endParaRPr lang="en-US" sz="1700" dirty="0"/>
           </a:p>
@@ -6527,7 +6527,7 @@
                 <a:ea typeface="Inter" pitchFamily="34" charset="-122"/>
                 <a:cs typeface="Inter" pitchFamily="34" charset="-120"/>
               </a:rPr>
-              <a:t>Opcodes</a:t>
+              <a:t>Labor Mix</a:t>
             </a:r>
             <a:endParaRPr lang="en-US" sz="1700" dirty="0"/>
           </a:p>
@@ -6586,7 +6586,7 @@
                 <a:ea typeface="Inter" pitchFamily="34" charset="-122"/>
                 <a:cs typeface="Inter" pitchFamily="34" charset="-120"/>
               </a:rPr>
-              <a:t>Warranty</a:t>
+              <a:t>Productivity</a:t>
             </a:r>
             <a:endParaRPr lang="en-US" sz="1700" dirty="0"/>
           </a:p>
@@ -6645,7 +6645,7 @@
                 <a:ea typeface="Inter" pitchFamily="34" charset="-122"/>
                 <a:cs typeface="Inter" pitchFamily="34" charset="-120"/>
               </a:rPr>
-              <a:t>Productivity</a:t>
+              <a:t>Warranty</a:t>
             </a:r>
             <a:endParaRPr lang="en-US" sz="1700" dirty="0"/>
           </a:p>
@@ -6838,7 +6838,7 @@
                 <a:ea typeface="Inter" pitchFamily="34" charset="-122"/>
                 <a:cs typeface="Inter" pitchFamily="34" charset="-120"/>
               </a:rPr>
-              <a:t>Opcode Benchmarks</a:t>
+              <a:t>Labor Mix</a:t>
             </a:r>
             <a:endParaRPr lang="en-US" sz="7600" dirty="0"/>
           </a:p>
@@ -6877,7 +6877,7 @@
                 <a:ea typeface="Inter" pitchFamily="34" charset="-122"/>
                 <a:cs typeface="Inter" pitchFamily="34" charset="-120"/>
               </a:rPr>
-              <a:t>MPI 90%   ·   Alignment 15%   ·   Balance 15%   ·   Brake fluid 10%   ·   Fuel 7.5%</a:t>
+              <a:t>Pay type   ·   Internal rate &amp; margin   ·   Work type   ·   Op code descriptions</a:t>
             </a:r>
             <a:endParaRPr lang="en-US" sz="2200" dirty="0"/>
           </a:p>
@@ -7113,7 +7113,7 @@
                 <a:ea typeface="Inter" pitchFamily="34" charset="-122"/>
                 <a:cs typeface="Inter" pitchFamily="34" charset="-120"/>
               </a:rPr>
-              <a:t>Labor Mix</a:t>
+              <a:t>Opcodes</a:t>
             </a:r>
             <a:endParaRPr lang="en-US" sz="1700" dirty="0"/>
           </a:p>
@@ -7172,7 +7172,7 @@
                 <a:ea typeface="Inter" pitchFamily="34" charset="-122"/>
                 <a:cs typeface="Inter" pitchFamily="34" charset="-120"/>
               </a:rPr>
-              <a:t>Opcodes</a:t>
+              <a:t>Labor Mix</a:t>
             </a:r>
             <a:endParaRPr lang="en-US" sz="1700" dirty="0"/>
           </a:p>
@@ -7231,7 +7231,7 @@
                 <a:ea typeface="Inter" pitchFamily="34" charset="-122"/>
                 <a:cs typeface="Inter" pitchFamily="34" charset="-120"/>
               </a:rPr>
-              <a:t>Warranty</a:t>
+              <a:t>Productivity</a:t>
             </a:r>
             <a:endParaRPr lang="en-US" sz="1700" dirty="0"/>
           </a:p>
@@ -7290,7 +7290,7 @@
                 <a:ea typeface="Inter" pitchFamily="34" charset="-122"/>
                 <a:cs typeface="Inter" pitchFamily="34" charset="-120"/>
               </a:rPr>
-              <a:t>Productivity</a:t>
+              <a:t>Warranty</a:t>
             </a:r>
             <a:endParaRPr lang="en-US" sz="1700" dirty="0"/>
           </a:p>
@@ -7483,7 +7483,7 @@
                 <a:ea typeface="Inter" pitchFamily="34" charset="-122"/>
                 <a:cs typeface="Inter" pitchFamily="34" charset="-120"/>
               </a:rPr>
-              <a:t>Warranty</a:t>
+              <a:t>Productivity</a:t>
             </a:r>
             <a:endParaRPr lang="en-US" sz="7600" dirty="0"/>
           </a:p>
@@ -7522,7 +7522,7 @@
                 <a:ea typeface="Inter" pitchFamily="34" charset="-122"/>
                 <a:cs typeface="Inter" pitchFamily="34" charset="-120"/>
               </a:rPr>
-              <a:t>Rate increases   ·   Warranty ELR   ·   Parts margin   ·   Warranty audits</a:t>
+              <a:t>Gross per employee   ·   ROs per person   ·   Headcount   ·   Technician proficiency</a:t>
             </a:r>
             <a:endParaRPr lang="en-US" sz="2200" dirty="0"/>
           </a:p>
@@ -7758,7 +7758,7 @@
                 <a:ea typeface="Inter" pitchFamily="34" charset="-122"/>
                 <a:cs typeface="Inter" pitchFamily="34" charset="-120"/>
               </a:rPr>
-              <a:t>Labor Mix</a:t>
+              <a:t>Opcodes</a:t>
             </a:r>
             <a:endParaRPr lang="en-US" sz="1700" dirty="0"/>
           </a:p>
@@ -7817,7 +7817,7 @@
                 <a:ea typeface="Inter" pitchFamily="34" charset="-122"/>
                 <a:cs typeface="Inter" pitchFamily="34" charset="-120"/>
               </a:rPr>
-              <a:t>Opcodes</a:t>
+              <a:t>Labor Mix</a:t>
             </a:r>
             <a:endParaRPr lang="en-US" sz="1700" dirty="0"/>
           </a:p>
@@ -7876,7 +7876,7 @@
                 <a:ea typeface="Inter" pitchFamily="34" charset="-122"/>
                 <a:cs typeface="Inter" pitchFamily="34" charset="-120"/>
               </a:rPr>
-              <a:t>Warranty</a:t>
+              <a:t>Productivity</a:t>
             </a:r>
             <a:endParaRPr lang="en-US" sz="1700" dirty="0"/>
           </a:p>
@@ -7935,7 +7935,7 @@
                 <a:ea typeface="Inter" pitchFamily="34" charset="-122"/>
                 <a:cs typeface="Inter" pitchFamily="34" charset="-120"/>
               </a:rPr>
-              <a:t>Productivity</a:t>
+              <a:t>Warranty</a:t>
             </a:r>
             <a:endParaRPr lang="en-US" sz="1700" dirty="0"/>
           </a:p>
@@ -8128,7 +8128,7 @@
                 <a:ea typeface="Inter" pitchFamily="34" charset="-122"/>
                 <a:cs typeface="Inter" pitchFamily="34" charset="-120"/>
               </a:rPr>
-              <a:t>Productivity</a:t>
+              <a:t>Warranty</a:t>
             </a:r>
             <a:endParaRPr lang="en-US" sz="7600" dirty="0"/>
           </a:p>
@@ -8167,7 +8167,7 @@
                 <a:ea typeface="Inter" pitchFamily="34" charset="-122"/>
                 <a:cs typeface="Inter" pitchFamily="34" charset="-120"/>
               </a:rPr>
-              <a:t>Gross per employee   ·   ROs per person   ·   Headcount   ·   Technician proficiency</a:t>
+              <a:t>Rate increases   ·   Warranty ELR   ·   Parts margin   ·   Warranty audits</a:t>
             </a:r>
             <a:endParaRPr lang="en-US" sz="2200" dirty="0"/>
           </a:p>
@@ -8403,7 +8403,7 @@
                 <a:ea typeface="Inter" pitchFamily="34" charset="-122"/>
                 <a:cs typeface="Inter" pitchFamily="34" charset="-120"/>
               </a:rPr>
-              <a:t>Labor Mix</a:t>
+              <a:t>Opcodes</a:t>
             </a:r>
             <a:endParaRPr lang="en-US" sz="1700" dirty="0"/>
           </a:p>
@@ -8462,7 +8462,7 @@
                 <a:ea typeface="Inter" pitchFamily="34" charset="-122"/>
                 <a:cs typeface="Inter" pitchFamily="34" charset="-120"/>
               </a:rPr>
-              <a:t>Opcodes</a:t>
+              <a:t>Labor Mix</a:t>
             </a:r>
             <a:endParaRPr lang="en-US" sz="1700" dirty="0"/>
           </a:p>
@@ -8521,7 +8521,7 @@
                 <a:ea typeface="Inter" pitchFamily="34" charset="-122"/>
                 <a:cs typeface="Inter" pitchFamily="34" charset="-120"/>
               </a:rPr>
-              <a:t>Warranty</a:t>
+              <a:t>Productivity</a:t>
             </a:r>
             <a:endParaRPr lang="en-US" sz="1700" dirty="0"/>
           </a:p>
@@ -8580,7 +8580,7 @@
                 <a:ea typeface="Inter" pitchFamily="34" charset="-122"/>
                 <a:cs typeface="Inter" pitchFamily="34" charset="-120"/>
               </a:rPr>
-              <a:t>Productivity</a:t>
+              <a:t>Warranty</a:t>
             </a:r>
             <a:endParaRPr lang="en-US" sz="1700" dirty="0"/>
           </a:p>

--- a/day2-deck/decks/Day 2 Opening - Day 1 Style.pptx
+++ b/day2-deck/decks/Day 2 Opening - Day 1 Style.pptx
@@ -688,7 +688,7 @@
           <a:p>
             <a:r>
               <a:rPr lang="en-US" dirty="0"/>
-              <a:t>For review with Tommy, not for the room. Every slide built but not placed in the deck: alternate versions of slides already in it, and slides not yet decided on. In deck order: Store Records (five designs), Door Rate option A, CP vs Internal GP % option A, Photo completion % (optional measure), Who's Moving Now alternate versions, Most Improved v1. Pick what moves into the deck, then delete this section before the meeting.</a:t>
+              <a:t>For review with Tommy, not for the room. Every slide built but not placed in the deck: alternate versions of slides already in it, and slides not yet decided on. In deck order: Store Records (five designs), Door Rate option A, CP vs Internal GP % option A, Photo completion % (optional measure), Who's Moving Now alternate versions and the line-chart versions taken out of the flow (Oct 23), Most Improved v1. Pick what moves into the deck, then delete this section before the meeting.</a:t>
             </a:r>
             <a:endParaRPr lang="en-US" dirty="0"/>
           </a:p>
@@ -2738,7 +2738,7 @@
                 <a:ea typeface="Inter" pitchFamily="34" charset="-122"/>
                 <a:cs typeface="Inter" pitchFamily="34" charset="-120"/>
               </a:rPr>
-              <a:t>Store records   ·   Door rate   ·   CP vs internal   ·   Photo %   ·   Most improved</a:t>
+              <a:t>Store records   ·   Door rate   ·   CP vs internal   ·   Photo %   ·   Who's moving now   ·   Most improved</a:t>
             </a:r>
             <a:endParaRPr lang="en-US" sz="2200" dirty="0"/>
           </a:p>

--- a/day2-deck/decks/Day 2 Opening - Day 1 Style.pptx
+++ b/day2-deck/decks/Day 2 Opening - Day 1 Style.pptx
@@ -3339,7 +3339,7 @@
                 <a:ea typeface="Inter" pitchFamily="34" charset="-122"/>
                 <a:cs typeface="Inter" pitchFamily="34" charset="-120"/>
               </a:rPr>
-              <a:t>ROs, hours per RO, rate and margin.</a:t>
+              <a:t>ROs, hours per RO, pricing and labor mix, rate and margin.</a:t>
             </a:r>
             <a:endParaRPr lang="en-US" sz="1400" dirty="0"/>
           </a:p>
@@ -3653,7 +3653,7 @@
                 <a:ea typeface="Inter" pitchFamily="34" charset="-122"/>
                 <a:cs typeface="Inter" pitchFamily="34" charset="-120"/>
               </a:rPr>
-              <a:t>Pay type and internal, maintenance and repair mix.</a:t>
+              <a:t>Internal labor rate and margin, then tracking and accountability.</a:t>
             </a:r>
             <a:endParaRPr lang="en-US" sz="1400" dirty="0"/>
           </a:p>
@@ -5587,7 +5587,7 @@
                 <a:ea typeface="Inter" pitchFamily="34" charset="-122"/>
                 <a:cs typeface="Inter" pitchFamily="34" charset="-120"/>
               </a:rPr>
-              <a:t>ROs   ·   Hours per RO   ·   ELR   ·   $ per RO   ·   Margin</a:t>
+              <a:t>ROs   ·   Hours per RO   ·   Pricing &amp; mix   ·   ELR   ·   $ per RO   ·   Margin</a:t>
             </a:r>
             <a:endParaRPr lang="en-US" sz="2200" dirty="0"/>
           </a:p>
@@ -6877,7 +6877,7 @@
                 <a:ea typeface="Inter" pitchFamily="34" charset="-122"/>
                 <a:cs typeface="Inter" pitchFamily="34" charset="-120"/>
               </a:rPr>
-              <a:t>Pay type   ·   Internal rate &amp; margin   ·   Work type   ·   Op code descriptions</a:t>
+              <a:t>Internal ELR   ·   Internal labor GP %   ·   Internal parts GP %   ·   Tracking</a:t>
             </a:r>
             <a:endParaRPr lang="en-US" sz="2200" dirty="0"/>
           </a:p>

--- a/day2-deck/decks/Day 2 Opening - Day 1 Style.pptx
+++ b/day2-deck/decks/Day 2 Opening - Day 1 Style.pptx
@@ -2388,7 +2388,7 @@
                 <a:ea typeface="Inter" pitchFamily="34" charset="-122"/>
                 <a:cs typeface="Inter" pitchFamily="34" charset="-120"/>
               </a:rPr>
-              <a:t>Labor Mix</a:t>
+              <a:t>Internal</a:t>
             </a:r>
             <a:endParaRPr lang="en-US" sz="1700" dirty="0"/>
           </a:p>
@@ -3614,7 +3614,7 @@
                 <a:ea typeface="Inter" pitchFamily="34" charset="-122"/>
                 <a:cs typeface="Inter" pitchFamily="34" charset="-120"/>
               </a:rPr>
-              <a:t>Labor Mix</a:t>
+              <a:t>Internal</a:t>
             </a:r>
             <a:endParaRPr lang="en-US" sz="1700" dirty="0"/>
           </a:p>
@@ -4592,7 +4592,7 @@
                 <a:ea typeface="Inter" pitchFamily="34" charset="-122"/>
                 <a:cs typeface="Inter" pitchFamily="34" charset="-120"/>
               </a:rPr>
-              <a:t>Labor Mix</a:t>
+              <a:t>Internal</a:t>
             </a:r>
             <a:endParaRPr lang="en-US" sz="1700" dirty="0"/>
           </a:p>
@@ -5237,7 +5237,7 @@
                 <a:ea typeface="Inter" pitchFamily="34" charset="-122"/>
                 <a:cs typeface="Inter" pitchFamily="34" charset="-120"/>
               </a:rPr>
-              <a:t>Labor Mix</a:t>
+              <a:t>Internal</a:t>
             </a:r>
             <a:endParaRPr lang="en-US" sz="1700" dirty="0"/>
           </a:p>
@@ -5882,7 +5882,7 @@
                 <a:ea typeface="Inter" pitchFamily="34" charset="-122"/>
                 <a:cs typeface="Inter" pitchFamily="34" charset="-120"/>
               </a:rPr>
-              <a:t>Labor Mix</a:t>
+              <a:t>Internal</a:t>
             </a:r>
             <a:endParaRPr lang="en-US" sz="1700" dirty="0"/>
           </a:p>
@@ -6527,7 +6527,7 @@
                 <a:ea typeface="Inter" pitchFamily="34" charset="-122"/>
                 <a:cs typeface="Inter" pitchFamily="34" charset="-120"/>
               </a:rPr>
-              <a:t>Labor Mix</a:t>
+              <a:t>Internal</a:t>
             </a:r>
             <a:endParaRPr lang="en-US" sz="1700" dirty="0"/>
           </a:p>
@@ -6838,7 +6838,7 @@
                 <a:ea typeface="Inter" pitchFamily="34" charset="-122"/>
                 <a:cs typeface="Inter" pitchFamily="34" charset="-120"/>
               </a:rPr>
-              <a:t>Labor Mix</a:t>
+              <a:t>Internal</a:t>
             </a:r>
             <a:endParaRPr lang="en-US" sz="7600" dirty="0"/>
           </a:p>
@@ -7172,7 +7172,7 @@
                 <a:ea typeface="Inter" pitchFamily="34" charset="-122"/>
                 <a:cs typeface="Inter" pitchFamily="34" charset="-120"/>
               </a:rPr>
-              <a:t>Labor Mix</a:t>
+              <a:t>Internal</a:t>
             </a:r>
             <a:endParaRPr lang="en-US" sz="1700" dirty="0"/>
           </a:p>
@@ -7817,7 +7817,7 @@
                 <a:ea typeface="Inter" pitchFamily="34" charset="-122"/>
                 <a:cs typeface="Inter" pitchFamily="34" charset="-120"/>
               </a:rPr>
-              <a:t>Labor Mix</a:t>
+              <a:t>Internal</a:t>
             </a:r>
             <a:endParaRPr lang="en-US" sz="1700" dirty="0"/>
           </a:p>
@@ -8462,7 +8462,7 @@
                 <a:ea typeface="Inter" pitchFamily="34" charset="-122"/>
                 <a:cs typeface="Inter" pitchFamily="34" charset="-120"/>
               </a:rPr>
-              <a:t>Labor Mix</a:t>
+              <a:t>Internal</a:t>
             </a:r>
             <a:endParaRPr lang="en-US" sz="1700" dirty="0"/>
           </a:p>

--- a/day2-deck/decks/Day 2 Opening - Day 1 Style.pptx
+++ b/day2-deck/decks/Day 2 Opening - Day 1 Style.pptx
@@ -3496,7 +3496,7 @@
                 <a:ea typeface="Inter" pitchFamily="34" charset="-122"/>
                 <a:cs typeface="Inter" pitchFamily="34" charset="-120"/>
               </a:rPr>
-              <a:t>MPI and video, then alignment, balance, brake fluid and fuel.</a:t>
+              <a:t>Express service, MPI and video, tracking, then alignment, balance, brake fluid and fuel.</a:t>
             </a:r>
             <a:endParaRPr lang="en-US" sz="1400" dirty="0"/>
           </a:p>
@@ -3653,7 +3653,7 @@
                 <a:ea typeface="Inter" pitchFamily="34" charset="-122"/>
                 <a:cs typeface="Inter" pitchFamily="34" charset="-120"/>
               </a:rPr>
-              <a:t>Internal labor rate and margin, then tracking and accountability.</a:t>
+              <a:t>Internal labor rate and margin.</a:t>
             </a:r>
             <a:endParaRPr lang="en-US" sz="1400" dirty="0"/>
           </a:p>
@@ -6877,7 +6877,7 @@
                 <a:ea typeface="Inter" pitchFamily="34" charset="-122"/>
                 <a:cs typeface="Inter" pitchFamily="34" charset="-120"/>
               </a:rPr>
-              <a:t>Internal ELR   ·   Internal labor GP %   ·   Internal parts GP %   ·   Tracking</a:t>
+              <a:t>Internal ELR   ·   Internal labor GP %   ·   Internal parts GP %</a:t>
             </a:r>
             <a:endParaRPr lang="en-US" sz="2200" dirty="0"/>
           </a:p>

--- a/day2-deck/decks/Day 2 Opening - Day 1 Style.pptx
+++ b/day2-deck/decks/Day 2 Opening - Day 1 Style.pptx
@@ -688,7 +688,7 @@
           <a:p>
             <a:r>
               <a:rPr lang="en-US" dirty="0"/>
-              <a:t>For review with Tommy, not for the room. Every slide built but not placed in the deck: alternate versions of slides already in it, and slides not yet decided on. In deck order: Store Records (five designs), Door Rate option A, CP vs Internal GP % option A, Photo completion % (optional measure), Who's Moving Now alternate versions and the line-chart versions taken out of the flow (Oct 23), Most Improved v1. Pick what moves into the deck, then delete this section before the meeting.</a:t>
+              <a:t>For review with Tommy, not for the room. Every slide built but not placed in the deck: alternate versions of slides already in it, and slides not yet decided on. In deck order: Store Records (five designs), Door Rate option A, CP vs Internal GP % option A, Photo completion % (optional measure), Productivity slides taken out of the flow (gross per employee gap, 5% more per employee, ROs per advisor, ROs per manager; Oct 23), Who's Moving Now alternate versions and the line-chart versions taken out of the flow (Oct 23), Most Improved v1. Pick what moves into the deck, then delete this section before the meeting.</a:t>
             </a:r>
             <a:endParaRPr lang="en-US" dirty="0"/>
           </a:p>
@@ -2738,7 +2738,7 @@
                 <a:ea typeface="Inter" pitchFamily="34" charset="-122"/>
                 <a:cs typeface="Inter" pitchFamily="34" charset="-120"/>
               </a:rPr>
-              <a:t>Store records   ·   Door rate   ·   CP vs internal   ·   Photo %   ·   Who's moving now   ·   Most improved</a:t>
+              <a:t>Store records   ·   Door rate   ·   CP vs internal   ·   Photo %   ·   Productivity   ·   Who's moving now   ·   Most improved</a:t>
             </a:r>
             <a:endParaRPr lang="en-US" sz="2200" dirty="0"/>
           </a:p>

--- a/day2-deck/decks/Day 2 Opening - Day 1 Style.pptx
+++ b/day2-deck/decks/Day 2 Opening - Day 1 Style.pptx
@@ -3810,7 +3810,7 @@
                 <a:ea typeface="Inter" pitchFamily="34" charset="-122"/>
                 <a:cs typeface="Inter" pitchFamily="34" charset="-120"/>
               </a:rPr>
-              <a:t>Gross per employee, headcount and technician proficiency.</a:t>
+              <a:t>Headcount, gross per employee and technician proficiency.</a:t>
             </a:r>
             <a:endParaRPr lang="en-US" sz="1400" dirty="0"/>
           </a:p>
@@ -7522,7 +7522,7 @@
                 <a:ea typeface="Inter" pitchFamily="34" charset="-122"/>
                 <a:cs typeface="Inter" pitchFamily="34" charset="-120"/>
               </a:rPr>
-              <a:t>Gross per employee   ·   ROs per person   ·   Headcount   ·   Technician proficiency</a:t>
+              <a:t>Headcount   ·   Gross per employee   ·   Technician proficiency</a:t>
             </a:r>
             <a:endParaRPr lang="en-US" sz="2200" dirty="0"/>
           </a:p>

--- a/day2-deck/decks/Day 2 Opening - Day 1 Style.pptx
+++ b/day2-deck/decks/Day 2 Opening - Day 1 Style.pptx
@@ -3025,7 +3025,7 @@
                 <a:ea typeface="Inter" pitchFamily="34" charset="-122"/>
                 <a:cs typeface="Inter" pitchFamily="34" charset="-120"/>
               </a:rPr>
-              <a:t>Fixed ops, service and parts gross, and the store records.</a:t>
+              <a:t>Fixed ops, service and parts gross performance.</a:t>
             </a:r>
             <a:endParaRPr lang="en-US" sz="1400" dirty="0"/>
           </a:p>
@@ -3182,7 +3182,7 @@
                 <a:ea typeface="Inter" pitchFamily="34" charset="-122"/>
                 <a:cs typeface="Inter" pitchFamily="34" charset="-120"/>
               </a:rPr>
-              <a:t>Absorption and net to gross.</a:t>
+              <a:t>What we keep, and how much of the store we cover.</a:t>
             </a:r>
             <a:endParaRPr lang="en-US" sz="1400" dirty="0"/>
           </a:p>
@@ -3339,7 +3339,7 @@
                 <a:ea typeface="Inter" pitchFamily="34" charset="-122"/>
                 <a:cs typeface="Inter" pitchFamily="34" charset="-120"/>
               </a:rPr>
-              <a:t>ROs, hours per RO, pricing and labor mix, rate and margin.</a:t>
+              <a:t>Car count, sales per visit, pricing and margin.</a:t>
             </a:r>
             <a:endParaRPr lang="en-US" sz="1400" dirty="0"/>
           </a:p>
@@ -3496,7 +3496,7 @@
                 <a:ea typeface="Inter" pitchFamily="34" charset="-122"/>
                 <a:cs typeface="Inter" pitchFamily="34" charset="-120"/>
               </a:rPr>
-              <a:t>Express service, MPI and video, tracking, then alignment, balance, brake fluid and fuel.</a:t>
+              <a:t>Inspections and key services against benchmark.</a:t>
             </a:r>
             <a:endParaRPr lang="en-US" sz="1400" dirty="0"/>
           </a:p>
@@ -3653,7 +3653,7 @@
                 <a:ea typeface="Inter" pitchFamily="34" charset="-122"/>
                 <a:cs typeface="Inter" pitchFamily="34" charset="-120"/>
               </a:rPr>
-              <a:t>Internal labor rate and margin.</a:t>
+              <a:t>Internal labor rate and margins.</a:t>
             </a:r>
             <a:endParaRPr lang="en-US" sz="1400" dirty="0"/>
           </a:p>
@@ -3810,7 +3810,7 @@
                 <a:ea typeface="Inter" pitchFamily="34" charset="-122"/>
                 <a:cs typeface="Inter" pitchFamily="34" charset="-120"/>
               </a:rPr>
-              <a:t>Headcount, gross per employee and technician proficiency.</a:t>
+              <a:t>Staffing, output and technician proficiency.</a:t>
             </a:r>
             <a:endParaRPr lang="en-US" sz="1400" dirty="0"/>
           </a:p>
@@ -3967,7 +3967,7 @@
                 <a:ea typeface="Inter" pitchFamily="34" charset="-122"/>
                 <a:cs typeface="Inter" pitchFamily="34" charset="-120"/>
               </a:rPr>
-              <a:t>Rate increases, warranty rate and parts margin, audits and compliance.</a:t>
+              <a:t>Warranty rates, margins and compliance.</a:t>
             </a:r>
             <a:endParaRPr lang="en-US" sz="1400" dirty="0"/>
           </a:p>
@@ -4124,7 +4124,7 @@
                 <a:ea typeface="Inter" pitchFamily="34" charset="-122"/>
                 <a:cs typeface="Inter" pitchFamily="34" charset="-120"/>
               </a:rPr>
-              <a:t>What changed, where the money is, and commitments.</a:t>
+              <a:t>What changed, where the money is, and what we commit to.</a:t>
             </a:r>
             <a:endParaRPr lang="en-US" sz="1400" dirty="0"/>
           </a:p>

--- a/day2-deck/decks/Day 2 Opening - Day 1 Style.pptx
+++ b/day2-deck/decks/Day 2 Opening - Day 1 Style.pptx
@@ -2093,7 +2093,7 @@
                 <a:ea typeface="Inter" pitchFamily="34" charset="-122"/>
                 <a:cs typeface="Inter" pitchFamily="34" charset="-120"/>
               </a:rPr>
-              <a:t>Most improved   ·   Where the money is   ·   Before you leave</a:t>
+              <a:t>Most improved   ·   Where the money is   ·   Store prescriptions</a:t>
             </a:r>
             <a:endParaRPr lang="en-US" sz="2200" dirty="0"/>
           </a:p>
@@ -3967,7 +3967,7 @@
                 <a:ea typeface="Inter" pitchFamily="34" charset="-122"/>
                 <a:cs typeface="Inter" pitchFamily="34" charset="-120"/>
               </a:rPr>
-              <a:t>Warranty rates, margins and compliance.</a:t>
+              <a:t>Rates, margins and compliance: protecting the money.</a:t>
             </a:r>
             <a:endParaRPr lang="en-US" sz="1400" dirty="0"/>
           </a:p>
@@ -4124,7 +4124,7 @@
                 <a:ea typeface="Inter" pitchFamily="34" charset="-122"/>
                 <a:cs typeface="Inter" pitchFamily="34" charset="-120"/>
               </a:rPr>
-              <a:t>What changed, where the money is, and what we commit to.</a:t>
+              <a:t>What changed, where the money is, and each store's prescription.</a:t>
             </a:r>
             <a:endParaRPr lang="en-US" sz="1400" dirty="0"/>
           </a:p>
@@ -8167,7 +8167,7 @@
                 <a:ea typeface="Inter" pitchFamily="34" charset="-122"/>
                 <a:cs typeface="Inter" pitchFamily="34" charset="-120"/>
               </a:rPr>
-              <a:t>Rate increases   ·   Warranty ELR   ·   Parts margin   ·   Warranty audits</a:t>
+              <a:t>Rates rising   ·   Warranty gross profit   ·   Claim process: protect the money</a:t>
             </a:r>
             <a:endParaRPr lang="en-US" sz="2200" dirty="0"/>
           </a:p>

--- a/day2-deck/decks/Day 2 Opening - Day 1 Style.pptx
+++ b/day2-deck/decks/Day 2 Opening - Day 1 Style.pptx
@@ -3182,7 +3182,7 @@
                 <a:ea typeface="Inter" pitchFamily="34" charset="-122"/>
                 <a:cs typeface="Inter" pitchFamily="34" charset="-120"/>
               </a:rPr>
-              <a:t>What we keep, and how much of the store we cover.</a:t>
+              <a:t>What we keep, and how much of the store's expenses fixed ops covers.</a:t>
             </a:r>
             <a:endParaRPr lang="en-US" sz="1400" dirty="0"/>
           </a:p>
@@ -4124,7 +4124,7 @@
                 <a:ea typeface="Inter" pitchFamily="34" charset="-122"/>
                 <a:cs typeface="Inter" pitchFamily="34" charset="-120"/>
               </a:rPr>
-              <a:t>What changed, where the money is, and each store's prescription.</a:t>
+              <a:t>What changed, where the money is, and prescriptions.</a:t>
             </a:r>
             <a:endParaRPr lang="en-US" sz="1400" dirty="0"/>
           </a:p>

--- a/day2-deck/decks/Day 2 Opening - Day 1 Style.pptx
+++ b/day2-deck/decks/Day 2 Opening - Day 1 Style.pptx
@@ -3182,7 +3182,7 @@
                 <a:ea typeface="Inter" pitchFamily="34" charset="-122"/>
                 <a:cs typeface="Inter" pitchFamily="34" charset="-120"/>
               </a:rPr>
-              <a:t>What we keep, and how much of the store's expenses fixed ops covers.</a:t>
+              <a:t>What we keep, and how much of the store expenses we cover.</a:t>
             </a:r>
             <a:endParaRPr lang="en-US" sz="1400" dirty="0"/>
           </a:p>
@@ -3967,7 +3967,7 @@
                 <a:ea typeface="Inter" pitchFamily="34" charset="-122"/>
                 <a:cs typeface="Inter" pitchFamily="34" charset="-120"/>
               </a:rPr>
-              <a:t>Rates, margins and compliance: protecting the money.</a:t>
+              <a:t>Rates, margins, compliance, and protecting the money.</a:t>
             </a:r>
             <a:endParaRPr lang="en-US" sz="1400" dirty="0"/>
           </a:p>

--- a/day2-deck/decks/Day 2 Opening - Day 1 Style.pptx
+++ b/day2-deck/decks/Day 2 Opening - Day 1 Style.pptx
@@ -3182,7 +3182,7 @@
                 <a:ea typeface="Inter" pitchFamily="34" charset="-122"/>
                 <a:cs typeface="Inter" pitchFamily="34" charset="-120"/>
               </a:rPr>
-              <a:t>What we keep, and how much of the store expenses we cover.</a:t>
+              <a:t>What we keep, and how much of the store's expenses we cover.</a:t>
             </a:r>
             <a:endParaRPr lang="en-US" sz="1400" dirty="0"/>
           </a:p>

--- a/day2-deck/decks/Day 2 Opening - Day 1 Style.pptx
+++ b/day2-deck/decks/Day 2 Opening - Day 1 Style.pptx
@@ -2738,7 +2738,7 @@
                 <a:ea typeface="Inter" pitchFamily="34" charset="-122"/>
                 <a:cs typeface="Inter" pitchFamily="34" charset="-120"/>
               </a:rPr>
-              <a:t>Store records   ·   Door rate   ·   CP vs internal   ·   Photo %   ·   Productivity   ·   Who's moving now   ·   Most improved</a:t>
+              <a:t>Door rate   ·   Productivity   ·   Proficiency   ·   Who's moving now   ·   Most improved   ·   Before you leave</a:t>
             </a:r>
             <a:endParaRPr lang="en-US" sz="2200" dirty="0"/>
           </a:p>
